--- a/AutoGrader-参赛答辩.pptx
+++ b/AutoGrader-参赛答辩.pptx
@@ -9169,7 +9169,7 @@
                 <a:latin typeface="微软雅黑"/>
                 <a:ea typeface="微软雅黑"/>
               </a:rPr>
-              <a:t>13.33</a:t>
+              <a:t>20.44</a:t>
             </a:r>
           </a:p>
         </p:txBody>
@@ -9344,7 +9344,7 @@
                 <a:latin typeface="微软雅黑"/>
                 <a:ea typeface="微软雅黑"/>
               </a:rPr>
-              <a:t>22.2%</a:t>
+              <a:t>0%</a:t>
             </a:r>
           </a:p>
         </p:txBody>
@@ -9519,7 +9519,7 @@
                 <a:latin typeface="微软雅黑"/>
                 <a:ea typeface="微软雅黑"/>
               </a:rPr>
-              <a:t>95.1%</a:t>
+              <a:t>84.9%</a:t>
             </a:r>
           </a:p>
         </p:txBody>
@@ -9618,8 +9618,8 @@
         </p:nvSpPr>
         <p:spPr>
           <a:xfrm>
-            <a:off x="566928" y="3291840"/>
-            <a:ext cx="11064240" cy="1051560"/>
+            <a:off x="566928" y="3127248"/>
+            <a:ext cx="11064240" cy="566928"/>
           </a:xfrm>
           <a:prstGeom prst="roundRect">
             <a:avLst>
@@ -9664,8 +9664,8 @@
         </p:nvSpPr>
         <p:spPr>
           <a:xfrm>
-            <a:off x="822960" y="3291840"/>
-            <a:ext cx="10607040" cy="1051560"/>
+            <a:off x="822960" y="3127248"/>
+            <a:ext cx="10607040" cy="566928"/>
           </a:xfrm>
           <a:prstGeom prst="rect">
             <a:avLst/>
@@ -9683,38 +9683,18 @@
                 <a:spcPct val="125000"/>
               </a:lnSpc>
               <a:spcAft>
-                <a:spcPts val="400"/>
-              </a:spcAft>
-            </a:pPr>
-            <a:r>
-              <a:rPr sz="1350" b="0">
-                <a:solidFill>
-                  <a:srgbClr val="1F2937"/>
-                </a:solidFill>
-                <a:latin typeface="微软雅黑"/>
-                <a:ea typeface="微软雅黑"/>
-              </a:rPr>
-              <a:t>评测方法：10 份真实实验报告，由非主程成员独立人工打分（gold set）——打分期间不看系统结果、不与主程讨论，完成后封存，直到评测当天才解封。</a:t>
-            </a:r>
-          </a:p>
-          <a:p>
-            <a:pPr algn="l">
-              <a:lnSpc>
-                <a:spcPct val="125000"/>
-              </a:lnSpc>
-              <a:spcAft>
                 <a:spcPts val="800"/>
               </a:spcAft>
             </a:pPr>
             <a:r>
-              <a:rPr sz="1200" b="0">
-                <a:solidFill>
-                  <a:srgbClr val="6B7280"/>
-                </a:solidFill>
-                <a:latin typeface="微软雅黑"/>
-                <a:ea typeface="微软雅黑"/>
-              </a:rPr>
-              <a:t>这是纪律问题：如果让写 prompt 的人来定「正确答案」，那等于对着答案改答案。</a:t>
+              <a:rPr sz="1150" b="1">
+                <a:solidFill>
+                  <a:srgbClr val="B45309"/>
+                </a:solidFill>
+                <a:latin typeface="微软雅黑"/>
+                <a:ea typeface="微软雅黑"/>
+              </a:rPr>
+              <a:t>缺陷修复后复测：待重跑 tools/benchmark.py 后填入（修复发生在 gold 解封之后，将如实标注修复动机）</a:t>
             </a:r>
           </a:p>
         </p:txBody>
@@ -9727,8 +9707,8 @@
         </p:nvSpPr>
         <p:spPr>
           <a:xfrm>
-            <a:off x="566928" y="4434840"/>
-            <a:ext cx="11064240" cy="1679448"/>
+            <a:off x="566928" y="3785615"/>
+            <a:ext cx="11064240" cy="868680"/>
           </a:xfrm>
           <a:prstGeom prst="roundRect">
             <a:avLst>
@@ -9767,14 +9747,123 @@
       </p:sp>
       <p:sp>
         <p:nvSpPr>
-          <p:cNvPr id="22" name="Rounded Rectangle 21"/>
+          <p:cNvPr id="22" name="TextBox 21"/>
+          <p:cNvSpPr txBox="1"/>
+          <p:nvPr/>
+        </p:nvSpPr>
+        <p:spPr>
+          <a:xfrm>
+            <a:off x="822960" y="3785615"/>
+            <a:ext cx="10607040" cy="868680"/>
+          </a:xfrm>
+          <a:prstGeom prst="rect">
+            <a:avLst/>
+          </a:prstGeom>
+          <a:noFill/>
+        </p:spPr>
+        <p:txBody>
+          <a:bodyPr wrap="square" anchor="ctr" lIns="0" rIns="0" tIns="0" bIns="0">
+            <a:spAutoFit/>
+          </a:bodyPr>
+          <a:lstStyle/>
+          <a:p>
+            <a:pPr algn="l">
+              <a:lnSpc>
+                <a:spcPct val="125000"/>
+              </a:lnSpc>
+              <a:spcAft>
+                <a:spcPts val="400"/>
+              </a:spcAft>
+            </a:pPr>
+            <a:r>
+              <a:rPr sz="1300" b="0">
+                <a:solidFill>
+                  <a:srgbClr val="1F2937"/>
+                </a:solidFill>
+                <a:latin typeface="微软雅黑"/>
+                <a:ea typeface="微软雅黑"/>
+              </a:rPr>
+              <a:t>评测方法：10 份真实实验报告由非主程成员独立人工打分（gold set）——打分期间不看系统结果、不与主程讨论，封存到评测当天才解封。</a:t>
+            </a:r>
+          </a:p>
+          <a:p>
+            <a:pPr algn="l">
+              <a:lnSpc>
+                <a:spcPct val="125000"/>
+              </a:lnSpc>
+              <a:spcAft>
+                <a:spcPts val="800"/>
+              </a:spcAft>
+            </a:pPr>
+            <a:r>
+              <a:rPr sz="1150" b="0">
+                <a:solidFill>
+                  <a:srgbClr val="6B7280"/>
+                </a:solidFill>
+                <a:latin typeface="微软雅黑"/>
+                <a:ea typeface="微软雅黑"/>
+              </a:rPr>
+              <a:t>这是纪律问题：让写 prompt 的人来定义「正确答案」，等于对着答案改答案。</a:t>
+            </a:r>
+          </a:p>
+        </p:txBody>
+      </p:sp>
+      <p:sp>
+        <p:nvSpPr>
+          <p:cNvPr id="23" name="Rounded Rectangle 22"/>
           <p:cNvSpPr/>
           <p:nvPr/>
         </p:nvSpPr>
         <p:spPr>
           <a:xfrm>
-            <a:off x="566928" y="4434840"/>
-            <a:ext cx="50292" cy="1679448"/>
+            <a:off x="566928" y="4745736"/>
+            <a:ext cx="11064240" cy="1380363"/>
+          </a:xfrm>
+          <a:prstGeom prst="roundRect">
+            <a:avLst>
+              <a:gd name="adj" fmla="val 8000"/>
+            </a:avLst>
+          </a:prstGeom>
+          <a:solidFill>
+            <a:srgbClr val="F3F4F6"/>
+          </a:solidFill>
+          <a:ln>
+            <a:noFill/>
+          </a:ln>
+          <a:effectLst/>
+        </p:spPr>
+        <p:style>
+          <a:lnRef idx="1">
+            <a:schemeClr val="accent1"/>
+          </a:lnRef>
+          <a:fillRef idx="3">
+            <a:schemeClr val="accent1"/>
+          </a:fillRef>
+          <a:effectRef idx="2">
+            <a:schemeClr val="accent1"/>
+          </a:effectRef>
+          <a:fontRef idx="minor">
+            <a:schemeClr val="lt1"/>
+          </a:fontRef>
+        </p:style>
+        <p:txBody>
+          <a:bodyPr rtlCol="0" anchor="ctr" wrap="square"/>
+          <a:lstStyle/>
+          <a:p>
+            <a:pPr algn="ctr"/>
+          </a:p>
+        </p:txBody>
+      </p:sp>
+      <p:sp>
+        <p:nvSpPr>
+          <p:cNvPr id="24" name="Rounded Rectangle 23"/>
+          <p:cNvSpPr/>
+          <p:nvPr/>
+        </p:nvSpPr>
+        <p:spPr>
+          <a:xfrm>
+            <a:off x="566928" y="4745736"/>
+            <a:ext cx="50292" cy="1380363"/>
           </a:xfrm>
           <a:prstGeom prst="roundRect">
             <a:avLst>
@@ -9813,13 +9902,13 @@
       </p:sp>
       <p:sp>
         <p:nvSpPr>
-          <p:cNvPr id="23" name="TextBox 22"/>
+          <p:cNvPr id="25" name="TextBox 24"/>
           <p:cNvSpPr txBox="1"/>
           <p:nvPr/>
         </p:nvSpPr>
         <p:spPr>
           <a:xfrm>
-            <a:off x="822960" y="4599431"/>
+            <a:off x="822960" y="4910328"/>
             <a:ext cx="10607040" cy="310896"/>
           </a:xfrm>
           <a:prstGeom prst="rect">
@@ -9856,14 +9945,14 @@
       </p:sp>
       <p:sp>
         <p:nvSpPr>
-          <p:cNvPr id="24" name="TextBox 23"/>
+          <p:cNvPr id="26" name="TextBox 25"/>
           <p:cNvSpPr txBox="1"/>
           <p:nvPr/>
         </p:nvSpPr>
         <p:spPr>
           <a:xfrm>
-            <a:off x="822960" y="4928616"/>
-            <a:ext cx="10607040" cy="1021080"/>
+            <a:off x="822960" y="5239512"/>
+            <a:ext cx="10607040" cy="721995"/>
           </a:xfrm>
           <a:prstGeom prst="rect">
             <a:avLst/>
@@ -9885,14 +9974,14 @@
               </a:spcAft>
             </a:pPr>
             <a:r>
-              <a:rPr sz="1200" b="0">
+              <a:rPr sz="1150" b="0">
                 <a:solidFill>
                   <a:srgbClr val="1F2937"/>
                 </a:solidFill>
                 <a:latin typeface="微软雅黑"/>
                 <a:ea typeface="微软雅黑"/>
               </a:rPr>
-              <a:t>9 份里 8 份被系统性低估。顺着这个单向偏差查下去：判定阶段只把报告 top-4 章节、每章截断 2500 字送进模型——模型实际只看到全文的 7%~11%。</a:t>
+              <a:t>9 份里 8 份被系统性低估。查下去发现判定阶段只把报告 top-4 章节、每章截断 2500 字送进模型，模型实际只看到全文的 7%~11%——纯工程缺陷，与 prompt 无关。</a:t>
             </a:r>
           </a:p>
           <a:p>
@@ -9905,34 +9994,14 @@
               </a:spcAft>
             </a:pPr>
             <a:r>
-              <a:rPr sz="1200" b="0">
+              <a:rPr sz="1150" b="0">
                 <a:solidFill>
                   <a:srgbClr val="1F2937"/>
                 </a:solidFill>
                 <a:latin typeface="微软雅黑"/>
                 <a:ea typeface="微软雅黑"/>
               </a:rPr>
-              <a:t>这是纯工程缺陷，与 prompt 无关。改为自适应全文后降到 13.33；此后我们没有为降低这个数字改动过任何 prompt。</a:t>
-            </a:r>
-          </a:p>
-          <a:p>
-            <a:pPr algn="l">
-              <a:lnSpc>
-                <a:spcPct val="125000"/>
-              </a:lnSpc>
-              <a:spcAft>
-                <a:spcPts val="600"/>
-              </a:spcAft>
-            </a:pPr>
-            <a:r>
-              <a:rPr sz="1200" b="0">
-                <a:solidFill>
-                  <a:srgbClr val="1F2937"/>
-                </a:solidFill>
-                <a:latin typeface="微软雅黑"/>
-                <a:ea typeface="微软雅黑"/>
-              </a:rPr>
-              <a:t>完整排查记录见仓库 docs/bugfix-上下文丢失.md。</a:t>
+              <a:t>修好后再完整重跑是 20.44 分：同一套代码两次跑分差这么多，是真实方差，我们不藏。三篇排查记录都在仓库 docs/ 下。</a:t>
             </a:r>
           </a:p>
         </p:txBody>

--- a/AutoGrader-参赛答辩.pptx
+++ b/AutoGrader-参赛答辩.pptx
@@ -9694,7 +9694,7 @@
                 <a:latin typeface="微软雅黑"/>
                 <a:ea typeface="微软雅黑"/>
               </a:rPr>
-              <a:t>缺陷修复后复测：待重跑 tools/benchmark.py 后填入（修复发生在 gold 解封之后，将如实标注修复动机）</a:t>
+              <a:t>缺陷修复后复测：MAE 10.78 分 / 误差≤5 占比 22.2% / 可溯源率 85.9%　——该修复发生在 gold 解封之后，是靠「系统性低估」这个信号查出来的，我们无法自证它没有沾到 gold 的光</a:t>
             </a:r>
           </a:p>
         </p:txBody>

--- a/AutoGrader-参赛答辩.pptx
+++ b/AutoGrader-参赛答辩.pptx
@@ -9694,7 +9694,7 @@
                 <a:latin typeface="微软雅黑"/>
                 <a:ea typeface="微软雅黑"/>
               </a:rPr>
-              <a:t>缺陷修复后复测：MAE 10.78 分 / 误差≤5 占比 22.2% / 可溯源率 85.9%　——该修复发生在 gold 解封之后，是靠「系统性低估」这个信号查出来的，我们无法自证它没有沾到 gold 的光</a:t>
+              <a:t>缺陷修复后复测：MAE 7.56 分 / 误差≤5 占比 33.3% / 可溯源率 93.0%　——该修复发生在 gold 解封之后，是靠「系统性低估」这个信号查出来的，我们无法自证它没有沾到 gold 的光</a:t>
             </a:r>
           </a:p>
         </p:txBody>

--- a/AutoGrader-参赛答辩.pptx
+++ b/AutoGrader-参赛答辩.pptx
@@ -9694,7 +9694,7 @@
                 <a:latin typeface="微软雅黑"/>
                 <a:ea typeface="微软雅黑"/>
               </a:rPr>
-              <a:t>缺陷修复后复测：MAE 7.56 分 / 误差≤5 占比 33.3% / 可溯源率 93.0%　——该修复发生在 gold 解封之后，是靠「系统性低估」这个信号查出来的，我们无法自证它没有沾到 gold 的光</a:t>
+              <a:t>缺陷修复后复测：MAE 6.89 分 / 误差≤5 占比 44.4% / 可溯源率 97.0%　——该修复发生在 gold 解封之后，是靠「系统性低估」这个信号查出来的，我们无法自证它没有沾到 gold 的光</a:t>
             </a:r>
           </a:p>
         </p:txBody>

--- a/AutoGrader-参赛答辩.pptx
+++ b/AutoGrader-参赛答辩.pptx
@@ -9694,7 +9694,7 @@
                 <a:latin typeface="微软雅黑"/>
                 <a:ea typeface="微软雅黑"/>
               </a:rPr>
-              <a:t>缺陷修复后复测：MAE 6.89 分 / 误差≤5 占比 44.4% / 可溯源率 97.0%　——该修复发生在 gold 解封之后，是靠「系统性低估」这个信号查出来的，我们无法自证它没有沾到 gold 的光</a:t>
+              <a:t>缺陷修复后复测：MAE 6.67 分 / 误差≤5 占比 33.3% / 可溯源率 96.9%　——该修复发生在 gold 解封之后，是靠「系统性低估」这个信号查出来的，我们无法自证它没有沾到 gold 的光。 同一份代码两次完整评测：MAE 6.67~6.89，误差≤5 占比 33.3%~44.4%，可溯源率 96.9%~97.0% —— 波动就摆出来</a:t>
             </a:r>
           </a:p>
         </p:txBody>

--- a/AutoGrader-参赛答辩.pptx
+++ b/AutoGrader-参赛答辩.pptx
@@ -3726,7 +3726,7 @@
                 <a:latin typeface="微软雅黑"/>
                 <a:ea typeface="微软雅黑"/>
               </a:rPr>
-              <a:t>团队成员：＿＿＿（专业 / 分工）　·　开源协议：MIT</a:t>
+              <a:t>团队成员：黄宇科、张镒川（深圳大学计算机与软件学院）　·　开源协议：MIT</a:t>
             </a:r>
           </a:p>
         </p:txBody>
@@ -10415,7 +10415,7 @@
                 <a:latin typeface="微软雅黑"/>
                 <a:ea typeface="微软雅黑"/>
               </a:rPr>
-              <a:t>① 上下文丢失：模型只看到报告 7%~11% 内容（MAE 31.67 → 13.33）</a:t>
+              <a:t>① 上下文丢失：模型只看到报告 7%~11% 内容（MAE 31.67 → 20.44）</a:t>
             </a:r>
           </a:p>
           <a:p>
@@ -10687,7 +10687,7 @@
         <p:spPr>
           <a:xfrm>
             <a:off x="566928" y="3822191"/>
-            <a:ext cx="5486400" cy="1646428"/>
+            <a:ext cx="5486400" cy="1795018"/>
           </a:xfrm>
           <a:prstGeom prst="roundRect">
             <a:avLst>
@@ -10733,7 +10733,7 @@
         <p:spPr>
           <a:xfrm>
             <a:off x="566928" y="3822191"/>
-            <a:ext cx="50292" cy="1646428"/>
+            <a:ext cx="50292" cy="1795018"/>
           </a:xfrm>
           <a:prstGeom prst="roundRect">
             <a:avLst>
@@ -10808,7 +10808,7 @@
                 <a:latin typeface="微软雅黑"/>
                 <a:ea typeface="微软雅黑"/>
               </a:rPr>
-              <a:t>团队与分工</a:t>
+              <a:t>团队与分工（2 人，均为计算机科学与技术专业）</a:t>
             </a:r>
           </a:p>
         </p:txBody>
@@ -10822,7 +10822,7 @@
         <p:spPr>
           <a:xfrm>
             <a:off x="822960" y="4315968"/>
-            <a:ext cx="5029200" cy="988059"/>
+            <a:ext cx="5029200" cy="1136650"/>
           </a:xfrm>
           <a:prstGeom prst="rect">
             <a:avLst/>
@@ -10844,14 +10844,14 @@
               </a:spcAft>
             </a:pPr>
             <a:r>
-              <a:rPr sz="1150" b="0">
+              <a:rPr sz="1100" b="0">
                 <a:solidFill>
                   <a:srgbClr val="1F2937"/>
                 </a:solidFill>
                 <a:latin typeface="微软雅黑"/>
                 <a:ea typeface="微软雅黑"/>
               </a:rPr>
-              <a:t>成员 A：主程 —— 代码 / 部署 / 版本管理</a:t>
+              <a:t>黄宇科（主程）：代码 / 部署 / 版本管理 / 自评测工具</a:t>
             </a:r>
           </a:p>
           <a:p>
@@ -10864,14 +10864,14 @@
               </a:spcAft>
             </a:pPr>
             <a:r>
-              <a:rPr sz="1150" b="0">
+              <a:rPr sz="1100" b="0">
                 <a:solidFill>
                   <a:srgbClr val="1F2937"/>
                 </a:solidFill>
                 <a:latin typeface="微软雅黑"/>
                 <a:ea typeface="微软雅黑"/>
               </a:rPr>
-              <a:t>成员 B：产品与材料 —— 脱敏 / 评分点 / 试用 / PPT / 视频</a:t>
+              <a:t>张镒川（产品与材料）：报告脱敏 / 评分点整理 / 独立人工打分 / 试用 / PPT / 视频</a:t>
             </a:r>
           </a:p>
           <a:p>
@@ -10884,14 +10884,14 @@
               </a:spcAft>
             </a:pPr>
             <a:r>
-              <a:rPr sz="1150" b="0">
+              <a:rPr sz="1100" b="0">
                 <a:solidFill>
                   <a:srgbClr val="1F2937"/>
                 </a:solidFill>
                 <a:latin typeface="微软雅黑"/>
                 <a:ea typeface="微软雅黑"/>
               </a:rPr>
-              <a:t>（此处按实际姓名与专业替换）</a:t>
+              <a:t>深圳大学计算机与软件学院 · 计算机科学与技术 · 2025 级 05 班</a:t>
             </a:r>
           </a:p>
         </p:txBody>

--- a/AutoGrader-参赛答辩.pptx
+++ b/AutoGrader-参赛答辩.pptx
@@ -9783,7 +9783,7 @@
                 <a:latin typeface="微软雅黑"/>
                 <a:ea typeface="微软雅黑"/>
               </a:rPr>
-              <a:t>评测方法：10 份真实实验报告由非主程成员独立人工打分（gold set）——打分期间不看系统结果、不与主程讨论，封存到评测当天才解封。</a:t>
+              <a:t>评测方法：9 份真实实验报告由非主程成员独立人工打分（gold set）——打分期间不看系统结果、不与主程讨论，封存到评测当天才解封。</a:t>
             </a:r>
           </a:p>
           <a:p>

--- a/AutoGrader-参赛答辩.pptx
+++ b/AutoGrader-参赛答辩.pptx
@@ -12,6 +12,7 @@
     <p:sldId id="260" r:id="rId11"/>
     <p:sldId id="261" r:id="rId12"/>
     <p:sldId id="262" r:id="rId13"/>
+    <p:sldId id="263" r:id="rId14"/>
   </p:sldIdLst>
   <p:sldSz cx="12191695" cy="6858000" type="screen4x3"/>
   <p:notesSz cx="6858000" cy="9144000"/>
@@ -3962,7 +3963,7 @@
                 <a:latin typeface="微软雅黑"/>
                 <a:ea typeface="微软雅黑"/>
               </a:rPr>
-              <a:t>02 / 07</a:t>
+              <a:t>02 / 08</a:t>
             </a:r>
           </a:p>
         </p:txBody>
@@ -5079,7 +5080,7 @@
                 <a:latin typeface="微软雅黑"/>
                 <a:ea typeface="微软雅黑"/>
               </a:rPr>
-              <a:t>03 / 07</a:t>
+              <a:t>03 / 08</a:t>
             </a:r>
           </a:p>
         </p:txBody>
@@ -6551,7 +6552,7 @@
                 <a:latin typeface="微软雅黑"/>
                 <a:ea typeface="微软雅黑"/>
               </a:rPr>
-              <a:t>04 / 07</a:t>
+              <a:t>04 / 08</a:t>
             </a:r>
           </a:p>
         </p:txBody>
@@ -7418,7 +7419,7 @@
                 <a:latin typeface="微软雅黑"/>
                 <a:ea typeface="微软雅黑"/>
               </a:rPr>
-              <a:t>05 / 07</a:t>
+              <a:t>05 / 08</a:t>
             </a:r>
           </a:p>
         </p:txBody>
@@ -9080,7 +9081,7 @@
                 <a:latin typeface="微软雅黑"/>
                 <a:ea typeface="微软雅黑"/>
               </a:rPr>
-              <a:t>06 / 07</a:t>
+              <a:t>06 / 08</a:t>
             </a:r>
           </a:p>
         </p:txBody>
@@ -9694,7 +9695,7 @@
                 <a:latin typeface="微软雅黑"/>
                 <a:ea typeface="微软雅黑"/>
               </a:rPr>
-              <a:t>缺陷修复后复测：MAE 6.67 分 / 误差≤5 占比 33.3% / 可溯源率 96.9%　——该修复发生在 gold 解封之后，是靠「系统性低估」这个信号查出来的，我们无法自证它没有沾到 gold 的光。 同一份代码两次完整评测：MAE 6.67~6.89，误差≤5 占比 33.3%~44.4%，可溯源率 96.9%~97.0% —— 波动就摆出来</a:t>
+              <a:t>缺陷修复后复测：MAE 7.56 分 / 误差≤5 占比 33.3% / 可溯源率 93.0%　——该修复发生在 gold 解封之后，是靠「系统性低估」这个信号查出来的，我们无法自证它没有沾到 gold 的光。 深度整改后同一份代码跑了两次完整评测：MAE 6.67~6.89，误差≤5 占比 33.3%~44.4%，可溯源率 96.9%~97.0% —— 波动就摆出来，不挑最好的一次</a:t>
             </a:r>
           </a:p>
         </p:txBody>
@@ -10062,7 +10063,7 @@
                 <a:latin typeface="微软雅黑"/>
                 <a:ea typeface="微软雅黑"/>
               </a:rPr>
-              <a:t>06 · AI 工具使用与下一步</a:t>
+              <a:t>06 · 多模态 OCR（新增能力）</a:t>
             </a:r>
           </a:p>
         </p:txBody>
@@ -10105,7 +10106,7 @@
                 <a:latin typeface="微软雅黑"/>
                 <a:ea typeface="微软雅黑"/>
               </a:rPr>
-              <a:t>AI 协作过程、团队与展望</a:t>
+              <a:t>把最大的能力缺口补上：截图里的证据现在读得到了</a:t>
             </a:r>
           </a:p>
         </p:txBody>
@@ -10237,7 +10238,7 @@
                 <a:latin typeface="微软雅黑"/>
                 <a:ea typeface="微软雅黑"/>
               </a:rPr>
-              <a:t>07 / 07</a:t>
+              <a:t>07 / 08</a:t>
             </a:r>
           </a:p>
         </p:txBody>
@@ -10251,7 +10252,7 @@
         <p:spPr>
           <a:xfrm>
             <a:off x="566928" y="1572768"/>
-            <a:ext cx="5486400" cy="2103120"/>
+            <a:ext cx="11064240" cy="1481328"/>
           </a:xfrm>
           <a:prstGeom prst="roundRect">
             <a:avLst>
@@ -10297,7 +10298,7 @@
         <p:spPr>
           <a:xfrm>
             <a:off x="566928" y="1572768"/>
-            <a:ext cx="50292" cy="2103120"/>
+            <a:ext cx="50292" cy="1481328"/>
           </a:xfrm>
           <a:prstGeom prst="roundRect">
             <a:avLst>
@@ -10343,7 +10344,7 @@
         <p:spPr>
           <a:xfrm>
             <a:off x="822960" y="1737360"/>
-            <a:ext cx="5029200" cy="310896"/>
+            <a:ext cx="10607040" cy="310896"/>
           </a:xfrm>
           <a:prstGeom prst="rect">
             <a:avLst/>
@@ -10372,7 +10373,7 @@
                 <a:latin typeface="微软雅黑"/>
                 <a:ea typeface="微软雅黑"/>
               </a:rPr>
-              <a:t>AI 帮我们抓到的两个真实缺陷</a:t>
+              <a:t>缺口：计算机实验报告最关键的证据是截图</a:t>
             </a:r>
           </a:p>
         </p:txBody>
@@ -10386,7 +10387,7 @@
         <p:spPr>
           <a:xfrm>
             <a:off x="822960" y="2066543"/>
-            <a:ext cx="5029200" cy="1444751"/>
+            <a:ext cx="10607040" cy="822960"/>
           </a:xfrm>
           <a:prstGeom prst="rect">
             <a:avLst/>
@@ -10415,47 +10416,7 @@
                 <a:latin typeface="微软雅黑"/>
                 <a:ea typeface="微软雅黑"/>
               </a:rPr>
-              <a:t>① 上下文丢失：模型只看到报告 7%~11% 内容（MAE 31.67 → 20.44）</a:t>
-            </a:r>
-          </a:p>
-          <a:p>
-            <a:pPr algn="l">
-              <a:lnSpc>
-                <a:spcPct val="125000"/>
-              </a:lnSpc>
-              <a:spcAft>
-                <a:spcPts val="600"/>
-              </a:spcAft>
-            </a:pPr>
-            <a:r>
-              <a:rPr sz="1200" b="0">
-                <a:solidFill>
-                  <a:srgbClr val="1F2937"/>
-                </a:solidFill>
-                <a:latin typeface="微软雅黑"/>
-                <a:ea typeface="微软雅黑"/>
-              </a:rPr>
-              <a:t>② 反馈生成失败：异常被 except 吞掉，查不到原因；最后靠另一项功能测试才炸出真凶——输出的 JSON 含未转义引号</a:t>
-            </a:r>
-          </a:p>
-          <a:p>
-            <a:pPr algn="l">
-              <a:lnSpc>
-                <a:spcPct val="125000"/>
-              </a:lnSpc>
-              <a:spcAft>
-                <a:spcPts val="600"/>
-              </a:spcAft>
-            </a:pPr>
-            <a:r>
-              <a:rPr sz="1200" b="0">
-                <a:solidFill>
-                  <a:srgbClr val="1F2937"/>
-                </a:solidFill>
-                <a:latin typeface="微软雅黑"/>
-                <a:ea typeface="微软雅黑"/>
-              </a:rPr>
-              <a:t>两篇排查记录都在仓库 docs/ 下，是当时写下的，不是事后美化</a:t>
+              <a:t>运行结果、报错信息、结果表格大量以截图形式存在。纯文本抽取只能拿到「运行结果示例」这行标题，正文是空的 —— 于是「结果与数据」这类评分点无据可依，一整类报告被系统性判低。此前我们把它写成「已知局限」，现在它被修掉了。</a:t>
             </a:r>
           </a:p>
         </p:txBody>
@@ -10468,8 +10429,8 @@
         </p:nvSpPr>
         <p:spPr>
           <a:xfrm>
-            <a:off x="6236208" y="1572768"/>
-            <a:ext cx="5394960" cy="2103120"/>
+            <a:off x="566928" y="3200400"/>
+            <a:ext cx="5486400" cy="2026158"/>
           </a:xfrm>
           <a:prstGeom prst="roundRect">
             <a:avLst>
@@ -10514,8 +10475,565 @@
         </p:nvSpPr>
         <p:spPr>
           <a:xfrm>
-            <a:off x="6236208" y="1572768"/>
-            <a:ext cx="50292" cy="2103120"/>
+            <a:off x="566928" y="3200400"/>
+            <a:ext cx="50292" cy="2026158"/>
+          </a:xfrm>
+          <a:prstGeom prst="roundRect">
+            <a:avLst>
+              <a:gd name="adj" fmla="val 50000"/>
+            </a:avLst>
+          </a:prstGeom>
+          <a:solidFill>
+            <a:srgbClr val="B45309"/>
+          </a:solidFill>
+          <a:ln>
+            <a:noFill/>
+          </a:ln>
+          <a:effectLst/>
+        </p:spPr>
+        <p:style>
+          <a:lnRef idx="1">
+            <a:schemeClr val="accent1"/>
+          </a:lnRef>
+          <a:fillRef idx="3">
+            <a:schemeClr val="accent1"/>
+          </a:fillRef>
+          <a:effectRef idx="2">
+            <a:schemeClr val="accent1"/>
+          </a:effectRef>
+          <a:fontRef idx="minor">
+            <a:schemeClr val="lt1"/>
+          </a:fontRef>
+        </p:style>
+        <p:txBody>
+          <a:bodyPr rtlCol="0" anchor="ctr" wrap="square"/>
+          <a:lstStyle/>
+          <a:p>
+            <a:pPr algn="ctr"/>
+          </a:p>
+        </p:txBody>
+      </p:sp>
+      <p:sp>
+        <p:nvSpPr>
+          <p:cNvPr id="13" name="TextBox 12"/>
+          <p:cNvSpPr txBox="1"/>
+          <p:nvPr/>
+        </p:nvSpPr>
+        <p:spPr>
+          <a:xfrm>
+            <a:off x="822960" y="3364992"/>
+            <a:ext cx="5029200" cy="310896"/>
+          </a:xfrm>
+          <a:prstGeom prst="rect">
+            <a:avLst/>
+          </a:prstGeom>
+          <a:noFill/>
+        </p:spPr>
+        <p:txBody>
+          <a:bodyPr wrap="square" anchor="t" lIns="0" rIns="0" tIns="0" bIns="0">
+            <a:spAutoFit/>
+          </a:bodyPr>
+          <a:lstStyle/>
+          <a:p>
+            <a:pPr algn="l">
+              <a:lnSpc>
+                <a:spcPct val="125000"/>
+              </a:lnSpc>
+              <a:spcAft>
+                <a:spcPts val="800"/>
+              </a:spcAft>
+            </a:pPr>
+            <a:r>
+              <a:rPr sz="1500" b="1">
+                <a:solidFill>
+                  <a:srgbClr val="B45309"/>
+                </a:solidFill>
+                <a:latin typeface="微软雅黑"/>
+                <a:ea typeface="微软雅黑"/>
+              </a:rPr>
+              <a:t>怎么做的</a:t>
+            </a:r>
+          </a:p>
+        </p:txBody>
+      </p:sp>
+      <p:sp>
+        <p:nvSpPr>
+          <p:cNvPr id="14" name="TextBox 13"/>
+          <p:cNvSpPr txBox="1"/>
+          <p:nvPr/>
+        </p:nvSpPr>
+        <p:spPr>
+          <a:xfrm>
+            <a:off x="822960" y="3694176"/>
+            <a:ext cx="5029200" cy="1367790"/>
+          </a:xfrm>
+          <a:prstGeom prst="rect">
+            <a:avLst/>
+          </a:prstGeom>
+          <a:noFill/>
+        </p:spPr>
+        <p:txBody>
+          <a:bodyPr wrap="square" anchor="t" lIns="0" rIns="0" tIns="0" bIns="0">
+            <a:spAutoFit/>
+          </a:bodyPr>
+          <a:lstStyle/>
+          <a:p>
+            <a:pPr algn="l">
+              <a:lnSpc>
+                <a:spcPct val="125000"/>
+              </a:lnSpc>
+              <a:spcAft>
+                <a:spcPts val="600"/>
+              </a:spcAft>
+            </a:pPr>
+            <a:r>
+              <a:rPr sz="1150" b="0">
+                <a:solidFill>
+                  <a:srgbClr val="1F2937"/>
+                </a:solidFill>
+                <a:latin typeface="微软雅黑"/>
+                <a:ea typeface="微软雅黑"/>
+              </a:rPr>
+              <a:t>逐页渲染成图片，交给 deepseek-flash（DeepSeek-V4.1-Flash，官方标注 Vision）转录</a:t>
+            </a:r>
+          </a:p>
+          <a:p>
+            <a:pPr algn="l">
+              <a:lnSpc>
+                <a:spcPct val="125000"/>
+              </a:lnSpc>
+              <a:spcAft>
+                <a:spcPts val="600"/>
+              </a:spcAft>
+            </a:pPr>
+            <a:r>
+              <a:rPr sz="1150" b="0">
+                <a:solidFill>
+                  <a:srgbClr val="1F2937"/>
+                </a:solidFill>
+                <a:latin typeface="微软雅黑"/>
+                <a:ea typeface="微软雅黑"/>
+              </a:rPr>
+              <a:t>两种档位：正文没有代码/输出 → 全量转录；正文已有代码 → 只描述图片，避免重复计分、成本更低</a:t>
+            </a:r>
+          </a:p>
+          <a:p>
+            <a:pPr algn="l">
+              <a:lnSpc>
+                <a:spcPct val="125000"/>
+              </a:lnSpc>
+              <a:spcAft>
+                <a:spcPts val="600"/>
+              </a:spcAft>
+            </a:pPr>
+            <a:r>
+              <a:rPr sz="1150" b="0">
+                <a:solidFill>
+                  <a:srgbClr val="1F2937"/>
+                </a:solidFill>
+                <a:latin typeface="微软雅黑"/>
+                <a:ea typeface="微软雅黑"/>
+              </a:rPr>
+              <a:t>结果按「文件哈希 + DPI + 模型 + 提示词版本」缓存，重复评阅不重复计费</a:t>
+            </a:r>
+          </a:p>
+        </p:txBody>
+      </p:sp>
+      <p:sp>
+        <p:nvSpPr>
+          <p:cNvPr id="15" name="Rounded Rectangle 14"/>
+          <p:cNvSpPr/>
+          <p:nvPr/>
+        </p:nvSpPr>
+        <p:spPr>
+          <a:xfrm>
+            <a:off x="6236208" y="3200400"/>
+            <a:ext cx="5394960" cy="2102358"/>
+          </a:xfrm>
+          <a:prstGeom prst="roundRect">
+            <a:avLst>
+              <a:gd name="adj" fmla="val 8000"/>
+            </a:avLst>
+          </a:prstGeom>
+          <a:solidFill>
+            <a:srgbClr val="F3F4F6"/>
+          </a:solidFill>
+          <a:ln>
+            <a:noFill/>
+          </a:ln>
+          <a:effectLst/>
+        </p:spPr>
+        <p:style>
+          <a:lnRef idx="1">
+            <a:schemeClr val="accent1"/>
+          </a:lnRef>
+          <a:fillRef idx="3">
+            <a:schemeClr val="accent1"/>
+          </a:fillRef>
+          <a:effectRef idx="2">
+            <a:schemeClr val="accent1"/>
+          </a:effectRef>
+          <a:fontRef idx="minor">
+            <a:schemeClr val="lt1"/>
+          </a:fontRef>
+        </p:style>
+        <p:txBody>
+          <a:bodyPr rtlCol="0" anchor="ctr" wrap="square"/>
+          <a:lstStyle/>
+          <a:p>
+            <a:pPr algn="ctr"/>
+          </a:p>
+        </p:txBody>
+      </p:sp>
+      <p:sp>
+        <p:nvSpPr>
+          <p:cNvPr id="16" name="Rounded Rectangle 15"/>
+          <p:cNvSpPr/>
+          <p:nvPr/>
+        </p:nvSpPr>
+        <p:spPr>
+          <a:xfrm>
+            <a:off x="6236208" y="3200400"/>
+            <a:ext cx="50292" cy="2102358"/>
+          </a:xfrm>
+          <a:prstGeom prst="roundRect">
+            <a:avLst>
+              <a:gd name="adj" fmla="val 50000"/>
+            </a:avLst>
+          </a:prstGeom>
+          <a:solidFill>
+            <a:srgbClr val="B45309"/>
+          </a:solidFill>
+          <a:ln>
+            <a:noFill/>
+          </a:ln>
+          <a:effectLst/>
+        </p:spPr>
+        <p:style>
+          <a:lnRef idx="1">
+            <a:schemeClr val="accent1"/>
+          </a:lnRef>
+          <a:fillRef idx="3">
+            <a:schemeClr val="accent1"/>
+          </a:fillRef>
+          <a:effectRef idx="2">
+            <a:schemeClr val="accent1"/>
+          </a:effectRef>
+          <a:fontRef idx="minor">
+            <a:schemeClr val="lt1"/>
+          </a:fontRef>
+        </p:style>
+        <p:txBody>
+          <a:bodyPr rtlCol="0" anchor="ctr" wrap="square"/>
+          <a:lstStyle/>
+          <a:p>
+            <a:pPr algn="ctr"/>
+          </a:p>
+        </p:txBody>
+      </p:sp>
+      <p:sp>
+        <p:nvSpPr>
+          <p:cNvPr id="17" name="TextBox 16"/>
+          <p:cNvSpPr txBox="1"/>
+          <p:nvPr/>
+        </p:nvSpPr>
+        <p:spPr>
+          <a:xfrm>
+            <a:off x="6492240" y="3364992"/>
+            <a:ext cx="4937760" cy="310896"/>
+          </a:xfrm>
+          <a:prstGeom prst="rect">
+            <a:avLst/>
+          </a:prstGeom>
+          <a:noFill/>
+        </p:spPr>
+        <p:txBody>
+          <a:bodyPr wrap="square" anchor="t" lIns="0" rIns="0" tIns="0" bIns="0">
+            <a:spAutoFit/>
+          </a:bodyPr>
+          <a:lstStyle/>
+          <a:p>
+            <a:pPr algn="l">
+              <a:lnSpc>
+                <a:spcPct val="125000"/>
+              </a:lnSpc>
+              <a:spcAft>
+                <a:spcPts val="800"/>
+              </a:spcAft>
+            </a:pPr>
+            <a:r>
+              <a:rPr sz="1500" b="1">
+                <a:solidFill>
+                  <a:srgbClr val="B45309"/>
+                </a:solidFill>
+                <a:latin typeface="微软雅黑"/>
+                <a:ea typeface="微软雅黑"/>
+              </a:rPr>
+              <a:t>守住的四条纪律</a:t>
+            </a:r>
+          </a:p>
+        </p:txBody>
+      </p:sp>
+      <p:sp>
+        <p:nvSpPr>
+          <p:cNvPr id="18" name="TextBox 17"/>
+          <p:cNvSpPr txBox="1"/>
+          <p:nvPr/>
+        </p:nvSpPr>
+        <p:spPr>
+          <a:xfrm>
+            <a:off x="6492240" y="3694176"/>
+            <a:ext cx="4937760" cy="1443990"/>
+          </a:xfrm>
+          <a:prstGeom prst="rect">
+            <a:avLst/>
+          </a:prstGeom>
+          <a:noFill/>
+        </p:spPr>
+        <p:txBody>
+          <a:bodyPr wrap="square" anchor="t" lIns="0" rIns="0" tIns="0" bIns="0">
+            <a:spAutoFit/>
+          </a:bodyPr>
+          <a:lstStyle/>
+          <a:p>
+            <a:pPr algn="l">
+              <a:lnSpc>
+                <a:spcPct val="125000"/>
+              </a:lnSpc>
+              <a:spcAft>
+                <a:spcPts val="600"/>
+              </a:spcAft>
+            </a:pPr>
+            <a:r>
+              <a:rPr sz="1150" b="0">
+                <a:solidFill>
+                  <a:srgbClr val="1F2937"/>
+                </a:solidFill>
+                <a:latin typeface="微软雅黑"/>
+                <a:ea typeface="微软雅黑"/>
+              </a:rPr>
+              <a:t>页码即坐标：每页转录带「第 N 页」标题，证据可以精确指到某一页</a:t>
+            </a:r>
+          </a:p>
+          <a:p>
+            <a:pPr algn="l">
+              <a:lnSpc>
+                <a:spcPct val="125000"/>
+              </a:lnSpc>
+              <a:spcAft>
+                <a:spcPts val="600"/>
+              </a:spcAft>
+            </a:pPr>
+            <a:r>
+              <a:rPr sz="1150" b="0">
+                <a:solidFill>
+                  <a:srgbClr val="1F2937"/>
+                </a:solidFill>
+                <a:latin typeface="微软雅黑"/>
+                <a:ea typeface="微软雅黑"/>
+              </a:rPr>
+              <a:t>读不出来就写「无法辨认」——「看不出内容」不等于「没有内容」</a:t>
+            </a:r>
+          </a:p>
+          <a:p>
+            <a:pPr algn="l">
+              <a:lnSpc>
+                <a:spcPct val="125000"/>
+              </a:lnSpc>
+              <a:spcAft>
+                <a:spcPts val="600"/>
+              </a:spcAft>
+            </a:pPr>
+            <a:r>
+              <a:rPr sz="1150" b="0">
+                <a:solidFill>
+                  <a:srgbClr val="1F2937"/>
+                </a:solidFill>
+                <a:latin typeface="微软雅黑"/>
+                <a:ea typeface="微软雅黑"/>
+              </a:rPr>
+              <a:t>逐页失败隔离：第 3 页读不出来不影响其余页，OCR 整体失败只降级、不阻断评阅</a:t>
+            </a:r>
+          </a:p>
+          <a:p>
+            <a:pPr algn="l">
+              <a:lnSpc>
+                <a:spcPct val="125000"/>
+              </a:lnSpc>
+              <a:spcAft>
+                <a:spcPts val="600"/>
+              </a:spcAft>
+            </a:pPr>
+            <a:r>
+              <a:rPr sz="1150" b="0">
+                <a:solidFill>
+                  <a:srgbClr val="1F2937"/>
+                </a:solidFill>
+                <a:latin typeface="微软雅黑"/>
+                <a:ea typeface="微软雅黑"/>
+              </a:rPr>
+              <a:t>OCR 只影响「模型能看到什么」，不参与最终裁定，界面同时给原始版面对照</a:t>
+            </a:r>
+          </a:p>
+        </p:txBody>
+      </p:sp>
+      <p:sp>
+        <p:nvSpPr>
+          <p:cNvPr id="19" name="TextBox 18"/>
+          <p:cNvSpPr txBox="1"/>
+          <p:nvPr/>
+        </p:nvSpPr>
+        <p:spPr>
+          <a:xfrm>
+            <a:off x="566928" y="5175504"/>
+            <a:ext cx="11064240" cy="640080"/>
+          </a:xfrm>
+          <a:prstGeom prst="rect">
+            <a:avLst/>
+          </a:prstGeom>
+          <a:noFill/>
+        </p:spPr>
+        <p:txBody>
+          <a:bodyPr wrap="square" anchor="t" lIns="0" rIns="0" tIns="0" bIns="0">
+            <a:spAutoFit/>
+          </a:bodyPr>
+          <a:lstStyle/>
+          <a:p>
+            <a:pPr algn="l">
+              <a:lnSpc>
+                <a:spcPct val="125000"/>
+              </a:lnSpc>
+              <a:spcAft>
+                <a:spcPts val="800"/>
+              </a:spcAft>
+            </a:pPr>
+            <a:r>
+              <a:rPr sz="1250" b="0">
+                <a:solidFill>
+                  <a:srgbClr val="6B7280"/>
+                </a:solidFill>
+                <a:latin typeface="微软雅黑"/>
+                <a:ea typeface="微软雅黑"/>
+              </a:rPr>
+              <a:t>一句话：这一页不是「我们打算做 OCR」，而是「OCR 已经跑通、有测试、可复现」。证据仍然必须通过代码的原文逐字校验 —— 读出来的内容不被特殊对待。</a:t>
+            </a:r>
+          </a:p>
+        </p:txBody>
+      </p:sp>
+    </p:spTree>
+  </p:cSld>
+  <p:clrMapOvr>
+    <a:masterClrMapping/>
+  </p:clrMapOvr>
+</p:sld>
+</file>
+
+<file path=ppt/slides/slide8.xml><?xml version="1.0" encoding="utf-8"?>
+<p:sld xmlns:a="http://schemas.openxmlformats.org/drawingml/2006/main" xmlns:p="http://schemas.openxmlformats.org/presentationml/2006/main" xmlns:r="http://schemas.openxmlformats.org/officeDocument/2006/relationships">
+  <p:cSld>
+    <p:spTree>
+      <p:nvGrpSpPr>
+        <p:cNvPr id="1" name=""/>
+        <p:cNvGrpSpPr/>
+        <p:nvPr/>
+      </p:nvGrpSpPr>
+      <p:grpSpPr/>
+      <p:sp>
+        <p:nvSpPr>
+          <p:cNvPr id="2" name="TextBox 1"/>
+          <p:cNvSpPr txBox="1"/>
+          <p:nvPr/>
+        </p:nvSpPr>
+        <p:spPr>
+          <a:xfrm>
+            <a:off x="566928" y="384048"/>
+            <a:ext cx="10515600" cy="274320"/>
+          </a:xfrm>
+          <a:prstGeom prst="rect">
+            <a:avLst/>
+          </a:prstGeom>
+          <a:noFill/>
+        </p:spPr>
+        <p:txBody>
+          <a:bodyPr wrap="square" anchor="t" lIns="0" rIns="0" tIns="0" bIns="0">
+            <a:spAutoFit/>
+          </a:bodyPr>
+          <a:lstStyle/>
+          <a:p>
+            <a:pPr algn="l">
+              <a:lnSpc>
+                <a:spcPct val="125000"/>
+              </a:lnSpc>
+              <a:spcAft>
+                <a:spcPts val="800"/>
+              </a:spcAft>
+            </a:pPr>
+            <a:r>
+              <a:rPr sz="1100" b="1">
+                <a:solidFill>
+                  <a:srgbClr val="0F766E"/>
+                </a:solidFill>
+                <a:latin typeface="微软雅黑"/>
+                <a:ea typeface="微软雅黑"/>
+              </a:rPr>
+              <a:t>07 · AI 工具使用与下一步</a:t>
+            </a:r>
+          </a:p>
+        </p:txBody>
+      </p:sp>
+      <p:sp>
+        <p:nvSpPr>
+          <p:cNvPr id="3" name="TextBox 2"/>
+          <p:cNvSpPr txBox="1"/>
+          <p:nvPr/>
+        </p:nvSpPr>
+        <p:spPr>
+          <a:xfrm>
+            <a:off x="566928" y="676656"/>
+            <a:ext cx="10881360" cy="658368"/>
+          </a:xfrm>
+          <a:prstGeom prst="rect">
+            <a:avLst/>
+          </a:prstGeom>
+          <a:noFill/>
+        </p:spPr>
+        <p:txBody>
+          <a:bodyPr wrap="square" anchor="t" lIns="0" rIns="0" tIns="0" bIns="0">
+            <a:spAutoFit/>
+          </a:bodyPr>
+          <a:lstStyle/>
+          <a:p>
+            <a:pPr algn="l">
+              <a:lnSpc>
+                <a:spcPct val="125000"/>
+              </a:lnSpc>
+              <a:spcAft>
+                <a:spcPts val="800"/>
+              </a:spcAft>
+            </a:pPr>
+            <a:r>
+              <a:rPr sz="2700" b="1">
+                <a:solidFill>
+                  <a:srgbClr val="1F2937"/>
+                </a:solidFill>
+                <a:latin typeface="微软雅黑"/>
+                <a:ea typeface="微软雅黑"/>
+              </a:rPr>
+              <a:t>AI 协作过程、团队与展望</a:t>
+            </a:r>
+          </a:p>
+        </p:txBody>
+      </p:sp>
+      <p:sp>
+        <p:nvSpPr>
+          <p:cNvPr id="4" name="Rounded Rectangle 3"/>
+          <p:cNvSpPr/>
+          <p:nvPr/>
+        </p:nvSpPr>
+        <p:spPr>
+          <a:xfrm>
+            <a:off x="566928" y="1389888"/>
+            <a:ext cx="960120" cy="50292"/>
           </a:xfrm>
           <a:prstGeom prst="roundRect">
             <a:avLst>
@@ -10554,14 +11072,14 @@
       </p:sp>
       <p:sp>
         <p:nvSpPr>
-          <p:cNvPr id="13" name="TextBox 12"/>
+          <p:cNvPr id="5" name="TextBox 4"/>
           <p:cNvSpPr txBox="1"/>
           <p:nvPr/>
         </p:nvSpPr>
         <p:spPr>
           <a:xfrm>
-            <a:off x="6492240" y="1737360"/>
-            <a:ext cx="4937760" cy="310896"/>
+            <a:off x="566928" y="6327648"/>
+            <a:ext cx="7315200" cy="256032"/>
           </a:xfrm>
           <a:prstGeom prst="rect">
             <a:avLst/>
@@ -10583,28 +11101,28 @@
               </a:spcAft>
             </a:pPr>
             <a:r>
-              <a:rPr sz="1500" b="1">
-                <a:solidFill>
-                  <a:srgbClr val="1F2937"/>
-                </a:solidFill>
-                <a:latin typeface="微软雅黑"/>
-                <a:ea typeface="微软雅黑"/>
-              </a:rPr>
-              <a:t>AI 在工程里的位置</a:t>
-            </a:r>
-          </a:p>
-        </p:txBody>
-      </p:sp>
-      <p:sp>
-        <p:nvSpPr>
-          <p:cNvPr id="14" name="TextBox 13"/>
+              <a:rPr sz="1000" b="0">
+                <a:solidFill>
+                  <a:srgbClr val="6B7280"/>
+                </a:solidFill>
+                <a:latin typeface="微软雅黑"/>
+                <a:ea typeface="微软雅黑"/>
+              </a:rPr>
+              <a:t>AutoGrader · RAG-E 四阶判定链 · 每条判定都可溯源到报告原文</a:t>
+            </a:r>
+          </a:p>
+        </p:txBody>
+      </p:sp>
+      <p:sp>
+        <p:nvSpPr>
+          <p:cNvPr id="6" name="TextBox 5"/>
           <p:cNvSpPr txBox="1"/>
           <p:nvPr/>
         </p:nvSpPr>
         <p:spPr>
           <a:xfrm>
-            <a:off x="6492240" y="2066543"/>
-            <a:ext cx="4937760" cy="1444751"/>
+            <a:off x="10241280" y="6327648"/>
+            <a:ext cx="1371600" cy="256032"/>
           </a:xfrm>
           <a:prstGeom prst="rect">
             <a:avLst/>
@@ -10617,77 +11135,37 @@
           </a:bodyPr>
           <a:lstStyle/>
           <a:p>
-            <a:pPr algn="l">
-              <a:lnSpc>
-                <a:spcPct val="125000"/>
-              </a:lnSpc>
-              <a:spcAft>
-                <a:spcPts val="600"/>
-              </a:spcAft>
-            </a:pPr>
-            <a:r>
-              <a:rPr sz="1200" b="0">
-                <a:solidFill>
-                  <a:srgbClr val="1F2937"/>
-                </a:solidFill>
-                <a:latin typeface="微软雅黑"/>
-                <a:ea typeface="微软雅黑"/>
-              </a:rPr>
-              <a:t>代码骨架、prompt 初稿、界面实现由 AI 协作产出</a:t>
-            </a:r>
-          </a:p>
-          <a:p>
-            <a:pPr algn="l">
-              <a:lnSpc>
-                <a:spcPct val="125000"/>
-              </a:lnSpc>
-              <a:spcAft>
-                <a:spcPts val="600"/>
-              </a:spcAft>
-            </a:pPr>
-            <a:r>
-              <a:rPr sz="1200" b="0">
-                <a:solidFill>
-                  <a:srgbClr val="1F2937"/>
-                </a:solidFill>
-                <a:latin typeface="微软雅黑"/>
-                <a:ea typeface="微软雅黑"/>
-              </a:rPr>
-              <a:t>判定规则、评分点定义、gold set 打分由人完成</a:t>
-            </a:r>
-          </a:p>
-          <a:p>
-            <a:pPr algn="l">
-              <a:lnSpc>
-                <a:spcPct val="125000"/>
-              </a:lnSpc>
-              <a:spcAft>
-                <a:spcPts val="600"/>
-              </a:spcAft>
-            </a:pPr>
-            <a:r>
-              <a:rPr sz="1200" b="0">
-                <a:solidFill>
-                  <a:srgbClr val="1F2937"/>
-                </a:solidFill>
-                <a:latin typeface="微软雅黑"/>
-                <a:ea typeface="微软雅黑"/>
-              </a:rPr>
-              <a:t>「不许吞异常」「不许放宽匹配规则」是我们给自己立的规矩</a:t>
-            </a:r>
-          </a:p>
-        </p:txBody>
-      </p:sp>
-      <p:sp>
-        <p:nvSpPr>
-          <p:cNvPr id="15" name="Rounded Rectangle 14"/>
+            <a:pPr algn="r">
+              <a:lnSpc>
+                <a:spcPct val="125000"/>
+              </a:lnSpc>
+              <a:spcAft>
+                <a:spcPts val="800"/>
+              </a:spcAft>
+            </a:pPr>
+            <a:r>
+              <a:rPr sz="1000" b="0">
+                <a:solidFill>
+                  <a:srgbClr val="6B7280"/>
+                </a:solidFill>
+                <a:latin typeface="微软雅黑"/>
+                <a:ea typeface="微软雅黑"/>
+              </a:rPr>
+              <a:t>08 / 08</a:t>
+            </a:r>
+          </a:p>
+        </p:txBody>
+      </p:sp>
+      <p:sp>
+        <p:nvSpPr>
+          <p:cNvPr id="7" name="Rounded Rectangle 6"/>
           <p:cNvSpPr/>
           <p:nvPr/>
         </p:nvSpPr>
         <p:spPr>
           <a:xfrm>
-            <a:off x="566928" y="3822191"/>
-            <a:ext cx="5486400" cy="1795018"/>
+            <a:off x="566928" y="1572768"/>
+            <a:ext cx="5486400" cy="2103120"/>
           </a:xfrm>
           <a:prstGeom prst="roundRect">
             <a:avLst>
@@ -10726,14 +11204,232 @@
       </p:sp>
       <p:sp>
         <p:nvSpPr>
-          <p:cNvPr id="16" name="Rounded Rectangle 15"/>
+          <p:cNvPr id="8" name="Rounded Rectangle 7"/>
           <p:cNvSpPr/>
           <p:nvPr/>
         </p:nvSpPr>
         <p:spPr>
           <a:xfrm>
-            <a:off x="566928" y="3822191"/>
-            <a:ext cx="50292" cy="1795018"/>
+            <a:off x="566928" y="1572768"/>
+            <a:ext cx="50292" cy="2103120"/>
+          </a:xfrm>
+          <a:prstGeom prst="roundRect">
+            <a:avLst>
+              <a:gd name="adj" fmla="val 50000"/>
+            </a:avLst>
+          </a:prstGeom>
+          <a:solidFill>
+            <a:srgbClr val="B45309"/>
+          </a:solidFill>
+          <a:ln>
+            <a:noFill/>
+          </a:ln>
+          <a:effectLst/>
+        </p:spPr>
+        <p:style>
+          <a:lnRef idx="1">
+            <a:schemeClr val="accent1"/>
+          </a:lnRef>
+          <a:fillRef idx="3">
+            <a:schemeClr val="accent1"/>
+          </a:fillRef>
+          <a:effectRef idx="2">
+            <a:schemeClr val="accent1"/>
+          </a:effectRef>
+          <a:fontRef idx="minor">
+            <a:schemeClr val="lt1"/>
+          </a:fontRef>
+        </p:style>
+        <p:txBody>
+          <a:bodyPr rtlCol="0" anchor="ctr" wrap="square"/>
+          <a:lstStyle/>
+          <a:p>
+            <a:pPr algn="ctr"/>
+          </a:p>
+        </p:txBody>
+      </p:sp>
+      <p:sp>
+        <p:nvSpPr>
+          <p:cNvPr id="9" name="TextBox 8"/>
+          <p:cNvSpPr txBox="1"/>
+          <p:nvPr/>
+        </p:nvSpPr>
+        <p:spPr>
+          <a:xfrm>
+            <a:off x="822960" y="1737360"/>
+            <a:ext cx="5029200" cy="310896"/>
+          </a:xfrm>
+          <a:prstGeom prst="rect">
+            <a:avLst/>
+          </a:prstGeom>
+          <a:noFill/>
+        </p:spPr>
+        <p:txBody>
+          <a:bodyPr wrap="square" anchor="t" lIns="0" rIns="0" tIns="0" bIns="0">
+            <a:spAutoFit/>
+          </a:bodyPr>
+          <a:lstStyle/>
+          <a:p>
+            <a:pPr algn="l">
+              <a:lnSpc>
+                <a:spcPct val="125000"/>
+              </a:lnSpc>
+              <a:spcAft>
+                <a:spcPts val="800"/>
+              </a:spcAft>
+            </a:pPr>
+            <a:r>
+              <a:rPr sz="1500" b="1">
+                <a:solidFill>
+                  <a:srgbClr val="B45309"/>
+                </a:solidFill>
+                <a:latin typeface="微软雅黑"/>
+                <a:ea typeface="微软雅黑"/>
+              </a:rPr>
+              <a:t>AI 帮我们抓到的两个真实缺陷</a:t>
+            </a:r>
+          </a:p>
+        </p:txBody>
+      </p:sp>
+      <p:sp>
+        <p:nvSpPr>
+          <p:cNvPr id="10" name="TextBox 9"/>
+          <p:cNvSpPr txBox="1"/>
+          <p:nvPr/>
+        </p:nvSpPr>
+        <p:spPr>
+          <a:xfrm>
+            <a:off x="822960" y="2066543"/>
+            <a:ext cx="5029200" cy="1444751"/>
+          </a:xfrm>
+          <a:prstGeom prst="rect">
+            <a:avLst/>
+          </a:prstGeom>
+          <a:noFill/>
+        </p:spPr>
+        <p:txBody>
+          <a:bodyPr wrap="square" anchor="t" lIns="0" rIns="0" tIns="0" bIns="0">
+            <a:spAutoFit/>
+          </a:bodyPr>
+          <a:lstStyle/>
+          <a:p>
+            <a:pPr algn="l">
+              <a:lnSpc>
+                <a:spcPct val="125000"/>
+              </a:lnSpc>
+              <a:spcAft>
+                <a:spcPts val="600"/>
+              </a:spcAft>
+            </a:pPr>
+            <a:r>
+              <a:rPr sz="1200" b="0">
+                <a:solidFill>
+                  <a:srgbClr val="1F2937"/>
+                </a:solidFill>
+                <a:latin typeface="微软雅黑"/>
+                <a:ea typeface="微软雅黑"/>
+              </a:rPr>
+              <a:t>① 上下文丢失：模型只看到报告 7%~11% 内容（MAE 31.67 → 20.44）</a:t>
+            </a:r>
+          </a:p>
+          <a:p>
+            <a:pPr algn="l">
+              <a:lnSpc>
+                <a:spcPct val="125000"/>
+              </a:lnSpc>
+              <a:spcAft>
+                <a:spcPts val="600"/>
+              </a:spcAft>
+            </a:pPr>
+            <a:r>
+              <a:rPr sz="1200" b="0">
+                <a:solidFill>
+                  <a:srgbClr val="1F2937"/>
+                </a:solidFill>
+                <a:latin typeface="微软雅黑"/>
+                <a:ea typeface="微软雅黑"/>
+              </a:rPr>
+              <a:t>② 反馈生成失败：异常被 except 吞掉，查不到原因；最后靠另一项功能测试才炸出真凶——输出的 JSON 含未转义引号</a:t>
+            </a:r>
+          </a:p>
+          <a:p>
+            <a:pPr algn="l">
+              <a:lnSpc>
+                <a:spcPct val="125000"/>
+              </a:lnSpc>
+              <a:spcAft>
+                <a:spcPts val="600"/>
+              </a:spcAft>
+            </a:pPr>
+            <a:r>
+              <a:rPr sz="1200" b="0">
+                <a:solidFill>
+                  <a:srgbClr val="1F2937"/>
+                </a:solidFill>
+                <a:latin typeface="微软雅黑"/>
+                <a:ea typeface="微软雅黑"/>
+              </a:rPr>
+              <a:t>两篇排查记录都在仓库 docs/ 下，是当时写下的，不是事后美化</a:t>
+            </a:r>
+          </a:p>
+        </p:txBody>
+      </p:sp>
+      <p:sp>
+        <p:nvSpPr>
+          <p:cNvPr id="11" name="Rounded Rectangle 10"/>
+          <p:cNvSpPr/>
+          <p:nvPr/>
+        </p:nvSpPr>
+        <p:spPr>
+          <a:xfrm>
+            <a:off x="6236208" y="1572768"/>
+            <a:ext cx="5394960" cy="2103120"/>
+          </a:xfrm>
+          <a:prstGeom prst="roundRect">
+            <a:avLst>
+              <a:gd name="adj" fmla="val 8000"/>
+            </a:avLst>
+          </a:prstGeom>
+          <a:solidFill>
+            <a:srgbClr val="F3F4F6"/>
+          </a:solidFill>
+          <a:ln>
+            <a:noFill/>
+          </a:ln>
+          <a:effectLst/>
+        </p:spPr>
+        <p:style>
+          <a:lnRef idx="1">
+            <a:schemeClr val="accent1"/>
+          </a:lnRef>
+          <a:fillRef idx="3">
+            <a:schemeClr val="accent1"/>
+          </a:fillRef>
+          <a:effectRef idx="2">
+            <a:schemeClr val="accent1"/>
+          </a:effectRef>
+          <a:fontRef idx="minor">
+            <a:schemeClr val="lt1"/>
+          </a:fontRef>
+        </p:style>
+        <p:txBody>
+          <a:bodyPr rtlCol="0" anchor="ctr" wrap="square"/>
+          <a:lstStyle/>
+          <a:p>
+            <a:pPr algn="ctr"/>
+          </a:p>
+        </p:txBody>
+      </p:sp>
+      <p:sp>
+        <p:nvSpPr>
+          <p:cNvPr id="12" name="Rounded Rectangle 11"/>
+          <p:cNvSpPr/>
+          <p:nvPr/>
+        </p:nvSpPr>
+        <p:spPr>
+          <a:xfrm>
+            <a:off x="6236208" y="1572768"/>
+            <a:ext cx="50292" cy="2103120"/>
           </a:xfrm>
           <a:prstGeom prst="roundRect">
             <a:avLst>
@@ -10772,14 +11468,14 @@
       </p:sp>
       <p:sp>
         <p:nvSpPr>
-          <p:cNvPr id="17" name="TextBox 16"/>
+          <p:cNvPr id="13" name="TextBox 12"/>
           <p:cNvSpPr txBox="1"/>
           <p:nvPr/>
         </p:nvSpPr>
         <p:spPr>
           <a:xfrm>
-            <a:off x="822960" y="3986783"/>
-            <a:ext cx="5029200" cy="310896"/>
+            <a:off x="6492240" y="1737360"/>
+            <a:ext cx="4937760" cy="310896"/>
           </a:xfrm>
           <a:prstGeom prst="rect">
             <a:avLst/>
@@ -10808,21 +11504,21 @@
                 <a:latin typeface="微软雅黑"/>
                 <a:ea typeface="微软雅黑"/>
               </a:rPr>
-              <a:t>团队与分工（2 人，均为计算机科学与技术专业）</a:t>
-            </a:r>
-          </a:p>
-        </p:txBody>
-      </p:sp>
-      <p:sp>
-        <p:nvSpPr>
-          <p:cNvPr id="18" name="TextBox 17"/>
+              <a:t>AI 在工程里的位置</a:t>
+            </a:r>
+          </a:p>
+        </p:txBody>
+      </p:sp>
+      <p:sp>
+        <p:nvSpPr>
+          <p:cNvPr id="14" name="TextBox 13"/>
           <p:cNvSpPr txBox="1"/>
           <p:nvPr/>
         </p:nvSpPr>
         <p:spPr>
           <a:xfrm>
-            <a:off x="822960" y="4315968"/>
-            <a:ext cx="5029200" cy="1136650"/>
+            <a:off x="6492240" y="2066543"/>
+            <a:ext cx="4937760" cy="1444751"/>
           </a:xfrm>
           <a:prstGeom prst="rect">
             <a:avLst/>
@@ -10844,14 +11540,14 @@
               </a:spcAft>
             </a:pPr>
             <a:r>
-              <a:rPr sz="1100" b="0">
+              <a:rPr sz="1200" b="0">
                 <a:solidFill>
                   <a:srgbClr val="1F2937"/>
                 </a:solidFill>
                 <a:latin typeface="微软雅黑"/>
                 <a:ea typeface="微软雅黑"/>
               </a:rPr>
-              <a:t>黄宇科（主程）：代码 / 部署 / 版本管理 / 自评测工具</a:t>
+              <a:t>代码骨架、prompt 初稿、界面实现由 AI 协作产出</a:t>
             </a:r>
           </a:p>
           <a:p>
@@ -10864,14 +11560,14 @@
               </a:spcAft>
             </a:pPr>
             <a:r>
-              <a:rPr sz="1100" b="0">
+              <a:rPr sz="1200" b="0">
                 <a:solidFill>
                   <a:srgbClr val="1F2937"/>
                 </a:solidFill>
                 <a:latin typeface="微软雅黑"/>
                 <a:ea typeface="微软雅黑"/>
               </a:rPr>
-              <a:t>张镒川（产品与材料）：报告脱敏 / 评分点整理 / 独立人工打分 / 试用 / PPT / 视频</a:t>
+              <a:t>判定规则、评分点定义、gold set 打分由人完成</a:t>
             </a:r>
           </a:p>
           <a:p>
@@ -10884,28 +11580,28 @@
               </a:spcAft>
             </a:pPr>
             <a:r>
-              <a:rPr sz="1100" b="0">
+              <a:rPr sz="1200" b="0">
                 <a:solidFill>
                   <a:srgbClr val="1F2937"/>
                 </a:solidFill>
                 <a:latin typeface="微软雅黑"/>
                 <a:ea typeface="微软雅黑"/>
               </a:rPr>
-              <a:t>深圳大学计算机与软件学院 · 计算机科学与技术 · 2025 级 05 班</a:t>
-            </a:r>
-          </a:p>
-        </p:txBody>
-      </p:sp>
-      <p:sp>
-        <p:nvSpPr>
-          <p:cNvPr id="19" name="Rounded Rectangle 18"/>
+              <a:t>「不许吞异常」「不许放宽匹配规则」是我们给自己立的规矩</a:t>
+            </a:r>
+          </a:p>
+        </p:txBody>
+      </p:sp>
+      <p:sp>
+        <p:nvSpPr>
+          <p:cNvPr id="15" name="Rounded Rectangle 14"/>
           <p:cNvSpPr/>
           <p:nvPr/>
         </p:nvSpPr>
         <p:spPr>
           <a:xfrm>
-            <a:off x="6236208" y="3822191"/>
-            <a:ext cx="5394960" cy="1463040"/>
+            <a:off x="566928" y="3822191"/>
+            <a:ext cx="5486400" cy="1795018"/>
           </a:xfrm>
           <a:prstGeom prst="roundRect">
             <a:avLst>
@@ -10944,14 +11640,14 @@
       </p:sp>
       <p:sp>
         <p:nvSpPr>
-          <p:cNvPr id="20" name="Rounded Rectangle 19"/>
+          <p:cNvPr id="16" name="Rounded Rectangle 15"/>
           <p:cNvSpPr/>
           <p:nvPr/>
         </p:nvSpPr>
         <p:spPr>
           <a:xfrm>
-            <a:off x="6236208" y="3822191"/>
-            <a:ext cx="50292" cy="1463040"/>
+            <a:off x="566928" y="3822191"/>
+            <a:ext cx="50292" cy="1795018"/>
           </a:xfrm>
           <a:prstGeom prst="roundRect">
             <a:avLst>
@@ -10990,14 +11686,14 @@
       </p:sp>
       <p:sp>
         <p:nvSpPr>
-          <p:cNvPr id="21" name="TextBox 20"/>
+          <p:cNvPr id="17" name="TextBox 16"/>
           <p:cNvSpPr txBox="1"/>
           <p:nvPr/>
         </p:nvSpPr>
         <p:spPr>
           <a:xfrm>
-            <a:off x="6492240" y="3986783"/>
-            <a:ext cx="4937760" cy="310896"/>
+            <a:off x="822960" y="3986783"/>
+            <a:ext cx="5029200" cy="310896"/>
           </a:xfrm>
           <a:prstGeom prst="rect">
             <a:avLst/>
@@ -11026,21 +11722,21 @@
                 <a:latin typeface="微软雅黑"/>
                 <a:ea typeface="微软雅黑"/>
               </a:rPr>
-              <a:t>下一步</a:t>
-            </a:r>
-          </a:p>
-        </p:txBody>
-      </p:sp>
-      <p:sp>
-        <p:nvSpPr>
-          <p:cNvPr id="22" name="TextBox 21"/>
+              <a:t>团队与分工（2 人，均为计算机科学与技术专业）</a:t>
+            </a:r>
+          </a:p>
+        </p:txBody>
+      </p:sp>
+      <p:sp>
+        <p:nvSpPr>
+          <p:cNvPr id="18" name="TextBox 17"/>
           <p:cNvSpPr txBox="1"/>
           <p:nvPr/>
         </p:nvSpPr>
         <p:spPr>
           <a:xfrm>
-            <a:off x="6492240" y="4315968"/>
-            <a:ext cx="4937760" cy="804672"/>
+            <a:off x="822960" y="4315968"/>
+            <a:ext cx="5029200" cy="1136650"/>
           </a:xfrm>
           <a:prstGeom prst="rect">
             <a:avLst/>
@@ -11062,14 +11758,14 @@
               </a:spcAft>
             </a:pPr>
             <a:r>
-              <a:rPr sz="1150" b="0">
+              <a:rPr sz="1100" b="0">
                 <a:solidFill>
                   <a:srgbClr val="1F2937"/>
                 </a:solidFill>
                 <a:latin typeface="微软雅黑"/>
                 <a:ea typeface="微软雅黑"/>
               </a:rPr>
-              <a:t>把评分模板扩到更多课程与学科</a:t>
+              <a:t>黄宇科（主程）：代码 / 部署 / 版本管理 / 自评测工具</a:t>
             </a:r>
           </a:p>
           <a:p>
@@ -11082,14 +11778,14 @@
               </a:spcAft>
             </a:pPr>
             <a:r>
-              <a:rPr sz="1150" b="0">
+              <a:rPr sz="1100" b="0">
                 <a:solidFill>
                   <a:srgbClr val="1F2937"/>
                 </a:solidFill>
                 <a:latin typeface="微软雅黑"/>
                 <a:ea typeface="微软雅黑"/>
               </a:rPr>
-              <a:t>增加班级维度的批量视图与学情统计</a:t>
+              <a:t>张镒川（产品与材料）：报告脱敏 / 评分点整理 / 独立人工打分 / 试用 / PPT / 视频</a:t>
             </a:r>
           </a:p>
           <a:p>
@@ -11102,28 +11798,120 @@
               </a:spcAft>
             </a:pPr>
             <a:r>
-              <a:rPr sz="1150" b="0">
+              <a:rPr sz="1100" b="0">
                 <a:solidFill>
                   <a:srgbClr val="1F2937"/>
                 </a:solidFill>
                 <a:latin typeface="微软雅黑"/>
                 <a:ea typeface="微软雅黑"/>
               </a:rPr>
-              <a:t>把「重复评阅」做成常态化的稳定性看板</a:t>
-            </a:r>
-          </a:p>
-        </p:txBody>
-      </p:sp>
-      <p:sp>
-        <p:nvSpPr>
-          <p:cNvPr id="23" name="TextBox 22"/>
+              <a:t>深圳大学计算机与软件学院 · 计算机科学与技术 · 2025 级 05 班</a:t>
+            </a:r>
+          </a:p>
+        </p:txBody>
+      </p:sp>
+      <p:sp>
+        <p:nvSpPr>
+          <p:cNvPr id="19" name="Rounded Rectangle 18"/>
+          <p:cNvSpPr/>
+          <p:nvPr/>
+        </p:nvSpPr>
+        <p:spPr>
+          <a:xfrm>
+            <a:off x="6236208" y="3822191"/>
+            <a:ext cx="5394960" cy="1646428"/>
+          </a:xfrm>
+          <a:prstGeom prst="roundRect">
+            <a:avLst>
+              <a:gd name="adj" fmla="val 8000"/>
+            </a:avLst>
+          </a:prstGeom>
+          <a:solidFill>
+            <a:srgbClr val="F3F4F6"/>
+          </a:solidFill>
+          <a:ln>
+            <a:noFill/>
+          </a:ln>
+          <a:effectLst/>
+        </p:spPr>
+        <p:style>
+          <a:lnRef idx="1">
+            <a:schemeClr val="accent1"/>
+          </a:lnRef>
+          <a:fillRef idx="3">
+            <a:schemeClr val="accent1"/>
+          </a:fillRef>
+          <a:effectRef idx="2">
+            <a:schemeClr val="accent1"/>
+          </a:effectRef>
+          <a:fontRef idx="minor">
+            <a:schemeClr val="lt1"/>
+          </a:fontRef>
+        </p:style>
+        <p:txBody>
+          <a:bodyPr rtlCol="0" anchor="ctr" wrap="square"/>
+          <a:lstStyle/>
+          <a:p>
+            <a:pPr algn="ctr"/>
+          </a:p>
+        </p:txBody>
+      </p:sp>
+      <p:sp>
+        <p:nvSpPr>
+          <p:cNvPr id="20" name="Rounded Rectangle 19"/>
+          <p:cNvSpPr/>
+          <p:nvPr/>
+        </p:nvSpPr>
+        <p:spPr>
+          <a:xfrm>
+            <a:off x="6236208" y="3822191"/>
+            <a:ext cx="50292" cy="1646428"/>
+          </a:xfrm>
+          <a:prstGeom prst="roundRect">
+            <a:avLst>
+              <a:gd name="adj" fmla="val 50000"/>
+            </a:avLst>
+          </a:prstGeom>
+          <a:solidFill>
+            <a:srgbClr val="0F766E"/>
+          </a:solidFill>
+          <a:ln>
+            <a:noFill/>
+          </a:ln>
+          <a:effectLst/>
+        </p:spPr>
+        <p:style>
+          <a:lnRef idx="1">
+            <a:schemeClr val="accent1"/>
+          </a:lnRef>
+          <a:fillRef idx="3">
+            <a:schemeClr val="accent1"/>
+          </a:fillRef>
+          <a:effectRef idx="2">
+            <a:schemeClr val="accent1"/>
+          </a:effectRef>
+          <a:fontRef idx="minor">
+            <a:schemeClr val="lt1"/>
+          </a:fontRef>
+        </p:style>
+        <p:txBody>
+          <a:bodyPr rtlCol="0" anchor="ctr" wrap="square"/>
+          <a:lstStyle/>
+          <a:p>
+            <a:pPr algn="ctr"/>
+          </a:p>
+        </p:txBody>
+      </p:sp>
+      <p:sp>
+        <p:nvSpPr>
+          <p:cNvPr id="21" name="TextBox 20"/>
           <p:cNvSpPr txBox="1"/>
           <p:nvPr/>
         </p:nvSpPr>
         <p:spPr>
           <a:xfrm>
-            <a:off x="566928" y="5413248"/>
-            <a:ext cx="11064240" cy="822960"/>
+            <a:off x="6492240" y="3986783"/>
+            <a:ext cx="4937760" cy="310896"/>
           </a:xfrm>
           <a:prstGeom prst="rect">
             <a:avLst/>
@@ -11141,6 +11929,132 @@
                 <a:spcPct val="125000"/>
               </a:lnSpc>
               <a:spcAft>
+                <a:spcPts val="800"/>
+              </a:spcAft>
+            </a:pPr>
+            <a:r>
+              <a:rPr sz="1500" b="1">
+                <a:solidFill>
+                  <a:srgbClr val="1F2937"/>
+                </a:solidFill>
+                <a:latin typeface="微软雅黑"/>
+                <a:ea typeface="微软雅黑"/>
+              </a:rPr>
+              <a:t>下一步</a:t>
+            </a:r>
+          </a:p>
+        </p:txBody>
+      </p:sp>
+      <p:sp>
+        <p:nvSpPr>
+          <p:cNvPr id="22" name="TextBox 21"/>
+          <p:cNvSpPr txBox="1"/>
+          <p:nvPr/>
+        </p:nvSpPr>
+        <p:spPr>
+          <a:xfrm>
+            <a:off x="6492240" y="4315968"/>
+            <a:ext cx="4937760" cy="988060"/>
+          </a:xfrm>
+          <a:prstGeom prst="rect">
+            <a:avLst/>
+          </a:prstGeom>
+          <a:noFill/>
+        </p:spPr>
+        <p:txBody>
+          <a:bodyPr wrap="square" anchor="t" lIns="0" rIns="0" tIns="0" bIns="0">
+            <a:spAutoFit/>
+          </a:bodyPr>
+          <a:lstStyle/>
+          <a:p>
+            <a:pPr algn="l">
+              <a:lnSpc>
+                <a:spcPct val="125000"/>
+              </a:lnSpc>
+              <a:spcAft>
+                <a:spcPts val="600"/>
+              </a:spcAft>
+            </a:pPr>
+            <a:r>
+              <a:rPr sz="1150" b="0">
+                <a:solidFill>
+                  <a:srgbClr val="1F2937"/>
+                </a:solidFill>
+                <a:latin typeface="微软雅黑"/>
+                <a:ea typeface="微软雅黑"/>
+              </a:rPr>
+              <a:t>把评分模板扩到更多课程与学科</a:t>
+            </a:r>
+          </a:p>
+          <a:p>
+            <a:pPr algn="l">
+              <a:lnSpc>
+                <a:spcPct val="125000"/>
+              </a:lnSpc>
+              <a:spcAft>
+                <a:spcPts val="600"/>
+              </a:spcAft>
+            </a:pPr>
+            <a:r>
+              <a:rPr sz="1150" b="0">
+                <a:solidFill>
+                  <a:srgbClr val="1F2937"/>
+                </a:solidFill>
+                <a:latin typeface="微软雅黑"/>
+                <a:ea typeface="微软雅黑"/>
+              </a:rPr>
+              <a:t>增加班级维度的批量视图与学情统计</a:t>
+            </a:r>
+          </a:p>
+          <a:p>
+            <a:pPr algn="l">
+              <a:lnSpc>
+                <a:spcPct val="125000"/>
+              </a:lnSpc>
+              <a:spcAft>
+                <a:spcPts val="600"/>
+              </a:spcAft>
+            </a:pPr>
+            <a:r>
+              <a:rPr sz="1150" b="0">
+                <a:solidFill>
+                  <a:srgbClr val="1F2937"/>
+                </a:solidFill>
+                <a:latin typeface="微软雅黑"/>
+                <a:ea typeface="微软雅黑"/>
+              </a:rPr>
+              <a:t>把多模态 OCR 扩到 DOCX 内嵌图片，并做一次读图准确率的人工抽样评测</a:t>
+            </a:r>
+          </a:p>
+        </p:txBody>
+      </p:sp>
+      <p:sp>
+        <p:nvSpPr>
+          <p:cNvPr id="23" name="TextBox 22"/>
+          <p:cNvSpPr txBox="1"/>
+          <p:nvPr/>
+        </p:nvSpPr>
+        <p:spPr>
+          <a:xfrm>
+            <a:off x="566928" y="5413248"/>
+            <a:ext cx="11064240" cy="822960"/>
+          </a:xfrm>
+          <a:prstGeom prst="rect">
+            <a:avLst/>
+          </a:prstGeom>
+          <a:noFill/>
+        </p:spPr>
+        <p:txBody>
+          <a:bodyPr wrap="square" anchor="t" lIns="0" rIns="0" tIns="0" bIns="0">
+            <a:spAutoFit/>
+          </a:bodyPr>
+          <a:lstStyle/>
+          <a:p>
+            <a:pPr algn="l">
+              <a:lnSpc>
+                <a:spcPct val="125000"/>
+              </a:lnSpc>
+              <a:spcAft>
                 <a:spcPts val="400"/>
               </a:spcAft>
             </a:pPr>
@@ -11172,7 +12086,7 @@
                 <a:latin typeface="微软雅黑"/>
                 <a:ea typeface="微软雅黑"/>
               </a:rPr>
-              <a:t>提交前提示：MAE / 误差占比 / 可溯源率以最新一次 benchmark 为准，若与本次不一致请以新数字更新本页。</a:t>
+              <a:t>提交前提示：MAE / 误差占比 / 可溯源率以最新一次 benchmark 为准，若与本次不一致请以新数字更新本页（本页与 README、作品主页读的是同一组值，三处必须一致 —— 评委交叉核对时对不上就是硬伤）。</a:t>
             </a:r>
           </a:p>
         </p:txBody>

--- a/AutoGrader-参赛答辩.pptx
+++ b/AutoGrader-参赛答辩.pptx
@@ -13,6 +13,7 @@
     <p:sldId id="261" r:id="rId12"/>
     <p:sldId id="262" r:id="rId13"/>
     <p:sldId id="263" r:id="rId14"/>
+    <p:sldId id="264" r:id="rId15"/>
   </p:sldIdLst>
   <p:sldSz cx="12191695" cy="6858000" type="screen4x3"/>
   <p:notesSz cx="6858000" cy="9144000"/>
@@ -3963,7 +3964,7 @@
                 <a:latin typeface="微软雅黑"/>
                 <a:ea typeface="微软雅黑"/>
               </a:rPr>
-              <a:t>02 / 08</a:t>
+              <a:t>02 / 09</a:t>
             </a:r>
           </a:p>
         </p:txBody>
@@ -5080,7 +5081,7 @@
                 <a:latin typeface="微软雅黑"/>
                 <a:ea typeface="微软雅黑"/>
               </a:rPr>
-              <a:t>03 / 08</a:t>
+              <a:t>03 / 09</a:t>
             </a:r>
           </a:p>
         </p:txBody>
@@ -6552,7 +6553,7 @@
                 <a:latin typeface="微软雅黑"/>
                 <a:ea typeface="微软雅黑"/>
               </a:rPr>
-              <a:t>04 / 08</a:t>
+              <a:t>04 / 09</a:t>
             </a:r>
           </a:p>
         </p:txBody>
@@ -7419,7 +7420,7 @@
                 <a:latin typeface="微软雅黑"/>
                 <a:ea typeface="微软雅黑"/>
               </a:rPr>
-              <a:t>05 / 08</a:t>
+              <a:t>05 / 09</a:t>
             </a:r>
           </a:p>
         </p:txBody>
@@ -9081,7 +9082,7 @@
                 <a:latin typeface="微软雅黑"/>
                 <a:ea typeface="微软雅黑"/>
               </a:rPr>
-              <a:t>06 / 08</a:t>
+              <a:t>06 / 09</a:t>
             </a:r>
           </a:p>
         </p:txBody>
@@ -10238,7 +10239,7 @@
                 <a:latin typeface="微软雅黑"/>
                 <a:ea typeface="微软雅黑"/>
               </a:rPr>
-              <a:t>07 / 08</a:t>
+              <a:t>07 / 09</a:t>
             </a:r>
           </a:p>
         </p:txBody>
@@ -10976,7 +10977,7 @@
                 <a:latin typeface="微软雅黑"/>
                 <a:ea typeface="微软雅黑"/>
               </a:rPr>
-              <a:t>07 · AI 工具使用与下一步</a:t>
+              <a:t>07 · 班级学情：教学管理闭环</a:t>
             </a:r>
           </a:p>
         </p:txBody>
@@ -11019,7 +11020,7 @@
                 <a:latin typeface="微软雅黑"/>
                 <a:ea typeface="微软雅黑"/>
               </a:rPr>
-              <a:t>AI 协作过程、团队与展望</a:t>
+              <a:t>从「一份报告几分」到「这个班卡在哪」</a:t>
             </a:r>
           </a:p>
         </p:txBody>
@@ -11151,7 +11152,1425 @@
                 <a:latin typeface="微软雅黑"/>
                 <a:ea typeface="微软雅黑"/>
               </a:rPr>
-              <a:t>08 / 08</a:t>
+              <a:t>08 / 09</a:t>
+            </a:r>
+          </a:p>
+        </p:txBody>
+      </p:sp>
+      <p:sp>
+        <p:nvSpPr>
+          <p:cNvPr id="7" name="Rounded Rectangle 6"/>
+          <p:cNvSpPr/>
+          <p:nvPr/>
+        </p:nvSpPr>
+        <p:spPr>
+          <a:xfrm>
+            <a:off x="566928" y="1572768"/>
+            <a:ext cx="11064240" cy="960120"/>
+          </a:xfrm>
+          <a:prstGeom prst="roundRect">
+            <a:avLst>
+              <a:gd name="adj" fmla="val 8000"/>
+            </a:avLst>
+          </a:prstGeom>
+          <a:solidFill>
+            <a:srgbClr val="F3F4F6"/>
+          </a:solidFill>
+          <a:ln>
+            <a:noFill/>
+          </a:ln>
+          <a:effectLst/>
+        </p:spPr>
+        <p:style>
+          <a:lnRef idx="1">
+            <a:schemeClr val="accent1"/>
+          </a:lnRef>
+          <a:fillRef idx="3">
+            <a:schemeClr val="accent1"/>
+          </a:fillRef>
+          <a:effectRef idx="2">
+            <a:schemeClr val="accent1"/>
+          </a:effectRef>
+          <a:fontRef idx="minor">
+            <a:schemeClr val="lt1"/>
+          </a:fontRef>
+        </p:style>
+        <p:txBody>
+          <a:bodyPr rtlCol="0" anchor="ctr" wrap="square"/>
+          <a:lstStyle/>
+          <a:p>
+            <a:pPr algn="ctr"/>
+          </a:p>
+        </p:txBody>
+      </p:sp>
+      <p:sp>
+        <p:nvSpPr>
+          <p:cNvPr id="8" name="Rounded Rectangle 7"/>
+          <p:cNvSpPr/>
+          <p:nvPr/>
+        </p:nvSpPr>
+        <p:spPr>
+          <a:xfrm>
+            <a:off x="566928" y="1572768"/>
+            <a:ext cx="50292" cy="960120"/>
+          </a:xfrm>
+          <a:prstGeom prst="roundRect">
+            <a:avLst>
+              <a:gd name="adj" fmla="val 50000"/>
+            </a:avLst>
+          </a:prstGeom>
+          <a:solidFill>
+            <a:srgbClr val="B45309"/>
+          </a:solidFill>
+          <a:ln>
+            <a:noFill/>
+          </a:ln>
+          <a:effectLst/>
+        </p:spPr>
+        <p:style>
+          <a:lnRef idx="1">
+            <a:schemeClr val="accent1"/>
+          </a:lnRef>
+          <a:fillRef idx="3">
+            <a:schemeClr val="accent1"/>
+          </a:fillRef>
+          <a:effectRef idx="2">
+            <a:schemeClr val="accent1"/>
+          </a:effectRef>
+          <a:fontRef idx="minor">
+            <a:schemeClr val="lt1"/>
+          </a:fontRef>
+        </p:style>
+        <p:txBody>
+          <a:bodyPr rtlCol="0" anchor="ctr" wrap="square"/>
+          <a:lstStyle/>
+          <a:p>
+            <a:pPr algn="ctr"/>
+          </a:p>
+        </p:txBody>
+      </p:sp>
+      <p:sp>
+        <p:nvSpPr>
+          <p:cNvPr id="9" name="TextBox 8"/>
+          <p:cNvSpPr txBox="1"/>
+          <p:nvPr/>
+        </p:nvSpPr>
+        <p:spPr>
+          <a:xfrm>
+            <a:off x="822960" y="1737360"/>
+            <a:ext cx="10607040" cy="310896"/>
+          </a:xfrm>
+          <a:prstGeom prst="rect">
+            <a:avLst/>
+          </a:prstGeom>
+          <a:noFill/>
+        </p:spPr>
+        <p:txBody>
+          <a:bodyPr wrap="square" anchor="t" lIns="0" rIns="0" tIns="0" bIns="0">
+            <a:spAutoFit/>
+          </a:bodyPr>
+          <a:lstStyle/>
+          <a:p>
+            <a:pPr algn="l">
+              <a:lnSpc>
+                <a:spcPct val="125000"/>
+              </a:lnSpc>
+              <a:spcAft>
+                <a:spcPts val="800"/>
+              </a:spcAft>
+            </a:pPr>
+            <a:r>
+              <a:rPr sz="1500" b="1">
+                <a:solidFill>
+                  <a:srgbClr val="B45309"/>
+                </a:solidFill>
+                <a:latin typeface="微软雅黑"/>
+                <a:ea typeface="微软雅黑"/>
+              </a:rPr>
+              <a:t>定位修正：管理要回答的是三个决策问题</a:t>
+            </a:r>
+          </a:p>
+        </p:txBody>
+      </p:sp>
+      <p:sp>
+        <p:nvSpPr>
+          <p:cNvPr id="10" name="TextBox 9"/>
+          <p:cNvSpPr txBox="1"/>
+          <p:nvPr/>
+        </p:nvSpPr>
+        <p:spPr>
+          <a:xfrm>
+            <a:off x="822960" y="2066543"/>
+            <a:ext cx="10607040" cy="301752"/>
+          </a:xfrm>
+          <a:prstGeom prst="rect">
+            <a:avLst/>
+          </a:prstGeom>
+          <a:noFill/>
+        </p:spPr>
+        <p:txBody>
+          <a:bodyPr wrap="square" anchor="t" lIns="0" rIns="0" tIns="0" bIns="0">
+            <a:spAutoFit/>
+          </a:bodyPr>
+          <a:lstStyle/>
+          <a:p>
+            <a:pPr algn="l">
+              <a:lnSpc>
+                <a:spcPct val="125000"/>
+              </a:lnSpc>
+              <a:spcAft>
+                <a:spcPts val="600"/>
+              </a:spcAft>
+            </a:pPr>
+            <a:r>
+              <a:rPr sz="1200" b="0">
+                <a:solidFill>
+                  <a:srgbClr val="1F2937"/>
+                </a:solidFill>
+                <a:latin typeface="微软雅黑"/>
+                <a:ea typeface="微软雅黑"/>
+              </a:rPr>
+              <a:t>**这个班普遍卡在哪 · 下一节课该讲什么 · 谁需要我找一趟** —— 此前我们只交付了「一份报告几分」，方向契合上是缺了一半的。</a:t>
+            </a:r>
+          </a:p>
+        </p:txBody>
+      </p:sp>
+      <p:sp>
+        <p:nvSpPr>
+          <p:cNvPr id="11" name="Rounded Rectangle 10"/>
+          <p:cNvSpPr/>
+          <p:nvPr/>
+        </p:nvSpPr>
+        <p:spPr>
+          <a:xfrm>
+            <a:off x="566928" y="2697480"/>
+            <a:ext cx="3566160" cy="1481328"/>
+          </a:xfrm>
+          <a:prstGeom prst="roundRect">
+            <a:avLst>
+              <a:gd name="adj" fmla="val 8000"/>
+            </a:avLst>
+          </a:prstGeom>
+          <a:solidFill>
+            <a:srgbClr val="F3F4F6"/>
+          </a:solidFill>
+          <a:ln>
+            <a:noFill/>
+          </a:ln>
+          <a:effectLst/>
+        </p:spPr>
+        <p:style>
+          <a:lnRef idx="1">
+            <a:schemeClr val="accent1"/>
+          </a:lnRef>
+          <a:fillRef idx="3">
+            <a:schemeClr val="accent1"/>
+          </a:fillRef>
+          <a:effectRef idx="2">
+            <a:schemeClr val="accent1"/>
+          </a:effectRef>
+          <a:fontRef idx="minor">
+            <a:schemeClr val="lt1"/>
+          </a:fontRef>
+        </p:style>
+        <p:txBody>
+          <a:bodyPr rtlCol="0" anchor="ctr" wrap="square"/>
+          <a:lstStyle/>
+          <a:p>
+            <a:pPr algn="ctr"/>
+          </a:p>
+        </p:txBody>
+      </p:sp>
+      <p:sp>
+        <p:nvSpPr>
+          <p:cNvPr id="12" name="TextBox 11"/>
+          <p:cNvSpPr txBox="1"/>
+          <p:nvPr/>
+        </p:nvSpPr>
+        <p:spPr>
+          <a:xfrm>
+            <a:off x="786384" y="2843784"/>
+            <a:ext cx="3127248" cy="658368"/>
+          </a:xfrm>
+          <a:prstGeom prst="rect">
+            <a:avLst/>
+          </a:prstGeom>
+          <a:noFill/>
+        </p:spPr>
+        <p:txBody>
+          <a:bodyPr wrap="square" anchor="t" lIns="0" rIns="0" tIns="0" bIns="0">
+            <a:spAutoFit/>
+          </a:bodyPr>
+          <a:lstStyle/>
+          <a:p>
+            <a:pPr algn="l">
+              <a:lnSpc>
+                <a:spcPct val="125000"/>
+              </a:lnSpc>
+              <a:spcAft>
+                <a:spcPts val="800"/>
+              </a:spcAft>
+            </a:pPr>
+            <a:r>
+              <a:rPr sz="3400" b="1">
+                <a:solidFill>
+                  <a:srgbClr val="B45309"/>
+                </a:solidFill>
+                <a:latin typeface="微软雅黑"/>
+                <a:ea typeface="微软雅黑"/>
+              </a:rPr>
+              <a:t>12</a:t>
+            </a:r>
+          </a:p>
+        </p:txBody>
+      </p:sp>
+      <p:sp>
+        <p:nvSpPr>
+          <p:cNvPr id="13" name="TextBox 12"/>
+          <p:cNvSpPr txBox="1"/>
+          <p:nvPr/>
+        </p:nvSpPr>
+        <p:spPr>
+          <a:xfrm>
+            <a:off x="786384" y="3502152"/>
+            <a:ext cx="3127248" cy="310896"/>
+          </a:xfrm>
+          <a:prstGeom prst="rect">
+            <a:avLst/>
+          </a:prstGeom>
+          <a:noFill/>
+        </p:spPr>
+        <p:txBody>
+          <a:bodyPr wrap="square" anchor="t" lIns="0" rIns="0" tIns="0" bIns="0">
+            <a:spAutoFit/>
+          </a:bodyPr>
+          <a:lstStyle/>
+          <a:p>
+            <a:pPr algn="l">
+              <a:lnSpc>
+                <a:spcPct val="125000"/>
+              </a:lnSpc>
+              <a:spcAft>
+                <a:spcPts val="800"/>
+              </a:spcAft>
+            </a:pPr>
+            <a:r>
+              <a:rPr sz="1300" b="1">
+                <a:solidFill>
+                  <a:srgbClr val="1F2937"/>
+                </a:solidFill>
+                <a:latin typeface="微软雅黑"/>
+                <a:ea typeface="微软雅黑"/>
+              </a:rPr>
+              <a:t>演示队列参评报告</a:t>
+            </a:r>
+          </a:p>
+        </p:txBody>
+      </p:sp>
+      <p:sp>
+        <p:nvSpPr>
+          <p:cNvPr id="14" name="TextBox 13"/>
+          <p:cNvSpPr txBox="1"/>
+          <p:nvPr/>
+        </p:nvSpPr>
+        <p:spPr>
+          <a:xfrm>
+            <a:off x="786384" y="3794760"/>
+            <a:ext cx="3127248" cy="292608"/>
+          </a:xfrm>
+          <a:prstGeom prst="rect">
+            <a:avLst/>
+          </a:prstGeom>
+          <a:noFill/>
+        </p:spPr>
+        <p:txBody>
+          <a:bodyPr wrap="square" anchor="t" lIns="0" rIns="0" tIns="0" bIns="0">
+            <a:spAutoFit/>
+          </a:bodyPr>
+          <a:lstStyle/>
+          <a:p>
+            <a:pPr algn="l">
+              <a:lnSpc>
+                <a:spcPct val="125000"/>
+              </a:lnSpc>
+              <a:spcAft>
+                <a:spcPts val="800"/>
+              </a:spcAft>
+            </a:pPr>
+            <a:r>
+              <a:rPr sz="1050" b="0">
+                <a:solidFill>
+                  <a:srgbClr val="6B7280"/>
+                </a:solidFill>
+                <a:latin typeface="微软雅黑"/>
+                <a:ea typeface="微软雅黑"/>
+              </a:rPr>
+              <a:t>9 份典型形态自造样本 + 3 份真实样本</a:t>
+            </a:r>
+          </a:p>
+        </p:txBody>
+      </p:sp>
+      <p:sp>
+        <p:nvSpPr>
+          <p:cNvPr id="15" name="Rounded Rectangle 14"/>
+          <p:cNvSpPr/>
+          <p:nvPr/>
+        </p:nvSpPr>
+        <p:spPr>
+          <a:xfrm>
+            <a:off x="4315968" y="2697480"/>
+            <a:ext cx="3566160" cy="1481328"/>
+          </a:xfrm>
+          <a:prstGeom prst="roundRect">
+            <a:avLst>
+              <a:gd name="adj" fmla="val 8000"/>
+            </a:avLst>
+          </a:prstGeom>
+          <a:solidFill>
+            <a:srgbClr val="F3F4F6"/>
+          </a:solidFill>
+          <a:ln>
+            <a:noFill/>
+          </a:ln>
+          <a:effectLst/>
+        </p:spPr>
+        <p:style>
+          <a:lnRef idx="1">
+            <a:schemeClr val="accent1"/>
+          </a:lnRef>
+          <a:fillRef idx="3">
+            <a:schemeClr val="accent1"/>
+          </a:fillRef>
+          <a:effectRef idx="2">
+            <a:schemeClr val="accent1"/>
+          </a:effectRef>
+          <a:fontRef idx="minor">
+            <a:schemeClr val="lt1"/>
+          </a:fontRef>
+        </p:style>
+        <p:txBody>
+          <a:bodyPr rtlCol="0" anchor="ctr" wrap="square"/>
+          <a:lstStyle/>
+          <a:p>
+            <a:pPr algn="ctr"/>
+          </a:p>
+        </p:txBody>
+      </p:sp>
+      <p:sp>
+        <p:nvSpPr>
+          <p:cNvPr id="16" name="TextBox 15"/>
+          <p:cNvSpPr txBox="1"/>
+          <p:nvPr/>
+        </p:nvSpPr>
+        <p:spPr>
+          <a:xfrm>
+            <a:off x="4535424" y="2843784"/>
+            <a:ext cx="3127248" cy="658368"/>
+          </a:xfrm>
+          <a:prstGeom prst="rect">
+            <a:avLst/>
+          </a:prstGeom>
+          <a:noFill/>
+        </p:spPr>
+        <p:txBody>
+          <a:bodyPr wrap="square" anchor="t" lIns="0" rIns="0" tIns="0" bIns="0">
+            <a:spAutoFit/>
+          </a:bodyPr>
+          <a:lstStyle/>
+          <a:p>
+            <a:pPr algn="l">
+              <a:lnSpc>
+                <a:spcPct val="125000"/>
+              </a:lnSpc>
+              <a:spcAft>
+                <a:spcPts val="800"/>
+              </a:spcAft>
+            </a:pPr>
+            <a:r>
+              <a:rPr sz="3400" b="1">
+                <a:solidFill>
+                  <a:srgbClr val="B45309"/>
+                </a:solidFill>
+                <a:latin typeface="微软雅黑"/>
+                <a:ea typeface="微软雅黑"/>
+              </a:rPr>
+              <a:t>66.7%</a:t>
+            </a:r>
+          </a:p>
+        </p:txBody>
+      </p:sp>
+      <p:sp>
+        <p:nvSpPr>
+          <p:cNvPr id="17" name="TextBox 16"/>
+          <p:cNvSpPr txBox="1"/>
+          <p:nvPr/>
+        </p:nvSpPr>
+        <p:spPr>
+          <a:xfrm>
+            <a:off x="4535424" y="3502152"/>
+            <a:ext cx="3127248" cy="310896"/>
+          </a:xfrm>
+          <a:prstGeom prst="rect">
+            <a:avLst/>
+          </a:prstGeom>
+          <a:noFill/>
+        </p:spPr>
+        <p:txBody>
+          <a:bodyPr wrap="square" anchor="t" lIns="0" rIns="0" tIns="0" bIns="0">
+            <a:spAutoFit/>
+          </a:bodyPr>
+          <a:lstStyle/>
+          <a:p>
+            <a:pPr algn="l">
+              <a:lnSpc>
+                <a:spcPct val="125000"/>
+              </a:lnSpc>
+              <a:spcAft>
+                <a:spcPts val="800"/>
+              </a:spcAft>
+            </a:pPr>
+            <a:r>
+              <a:rPr sz="1300" b="1">
+                <a:solidFill>
+                  <a:srgbClr val="1F2937"/>
+                </a:solidFill>
+                <a:latin typeface="微软雅黑"/>
+                <a:ea typeface="微软雅黑"/>
+              </a:rPr>
+              <a:t>及格率（≥60 分）</a:t>
+            </a:r>
+          </a:p>
+        </p:txBody>
+      </p:sp>
+      <p:sp>
+        <p:nvSpPr>
+          <p:cNvPr id="18" name="TextBox 17"/>
+          <p:cNvSpPr txBox="1"/>
+          <p:nvPr/>
+        </p:nvSpPr>
+        <p:spPr>
+          <a:xfrm>
+            <a:off x="4535424" y="3794760"/>
+            <a:ext cx="3127248" cy="292608"/>
+          </a:xfrm>
+          <a:prstGeom prst="rect">
+            <a:avLst/>
+          </a:prstGeom>
+          <a:noFill/>
+        </p:spPr>
+        <p:txBody>
+          <a:bodyPr wrap="square" anchor="t" lIns="0" rIns="0" tIns="0" bIns="0">
+            <a:spAutoFit/>
+          </a:bodyPr>
+          <a:lstStyle/>
+          <a:p>
+            <a:pPr algn="l">
+              <a:lnSpc>
+                <a:spcPct val="125000"/>
+              </a:lnSpc>
+              <a:spcAft>
+                <a:spcPts val="800"/>
+              </a:spcAft>
+            </a:pPr>
+            <a:r>
+              <a:rPr sz="1050" b="0">
+                <a:solidFill>
+                  <a:srgbClr val="6B7280"/>
+                </a:solidFill>
+                <a:latin typeface="微软雅黑"/>
+                <a:ea typeface="微软雅黑"/>
+              </a:rPr>
+              <a:t>均分 73，区间 0~100 —— 判定能把不同水平分开</a:t>
+            </a:r>
+          </a:p>
+        </p:txBody>
+      </p:sp>
+      <p:sp>
+        <p:nvSpPr>
+          <p:cNvPr id="19" name="Rounded Rectangle 18"/>
+          <p:cNvSpPr/>
+          <p:nvPr/>
+        </p:nvSpPr>
+        <p:spPr>
+          <a:xfrm>
+            <a:off x="8065008" y="2697480"/>
+            <a:ext cx="3566160" cy="1481328"/>
+          </a:xfrm>
+          <a:prstGeom prst="roundRect">
+            <a:avLst>
+              <a:gd name="adj" fmla="val 8000"/>
+            </a:avLst>
+          </a:prstGeom>
+          <a:solidFill>
+            <a:srgbClr val="F3F4F6"/>
+          </a:solidFill>
+          <a:ln>
+            <a:noFill/>
+          </a:ln>
+          <a:effectLst/>
+        </p:spPr>
+        <p:style>
+          <a:lnRef idx="1">
+            <a:schemeClr val="accent1"/>
+          </a:lnRef>
+          <a:fillRef idx="3">
+            <a:schemeClr val="accent1"/>
+          </a:fillRef>
+          <a:effectRef idx="2">
+            <a:schemeClr val="accent1"/>
+          </a:effectRef>
+          <a:fontRef idx="minor">
+            <a:schemeClr val="lt1"/>
+          </a:fontRef>
+        </p:style>
+        <p:txBody>
+          <a:bodyPr rtlCol="0" anchor="ctr" wrap="square"/>
+          <a:lstStyle/>
+          <a:p>
+            <a:pPr algn="ctr"/>
+          </a:p>
+        </p:txBody>
+      </p:sp>
+      <p:sp>
+        <p:nvSpPr>
+          <p:cNvPr id="20" name="TextBox 19"/>
+          <p:cNvSpPr txBox="1"/>
+          <p:nvPr/>
+        </p:nvSpPr>
+        <p:spPr>
+          <a:xfrm>
+            <a:off x="8284464" y="2843784"/>
+            <a:ext cx="3127248" cy="658368"/>
+          </a:xfrm>
+          <a:prstGeom prst="rect">
+            <a:avLst/>
+          </a:prstGeom>
+          <a:noFill/>
+        </p:spPr>
+        <p:txBody>
+          <a:bodyPr wrap="square" anchor="t" lIns="0" rIns="0" tIns="0" bIns="0">
+            <a:spAutoFit/>
+          </a:bodyPr>
+          <a:lstStyle/>
+          <a:p>
+            <a:pPr algn="l">
+              <a:lnSpc>
+                <a:spcPct val="125000"/>
+              </a:lnSpc>
+              <a:spcAft>
+                <a:spcPts val="800"/>
+              </a:spcAft>
+            </a:pPr>
+            <a:r>
+              <a:rPr sz="3400" b="1">
+                <a:solidFill>
+                  <a:srgbClr val="B45309"/>
+                </a:solidFill>
+                <a:latin typeface="微软雅黑"/>
+                <a:ea typeface="微软雅黑"/>
+              </a:rPr>
+              <a:t>7/12</a:t>
+            </a:r>
+          </a:p>
+        </p:txBody>
+      </p:sp>
+      <p:sp>
+        <p:nvSpPr>
+          <p:cNvPr id="21" name="TextBox 20"/>
+          <p:cNvSpPr txBox="1"/>
+          <p:nvPr/>
+        </p:nvSpPr>
+        <p:spPr>
+          <a:xfrm>
+            <a:off x="8284464" y="3502152"/>
+            <a:ext cx="3127248" cy="310896"/>
+          </a:xfrm>
+          <a:prstGeom prst="rect">
+            <a:avLst/>
+          </a:prstGeom>
+          <a:noFill/>
+        </p:spPr>
+        <p:txBody>
+          <a:bodyPr wrap="square" anchor="t" lIns="0" rIns="0" tIns="0" bIns="0">
+            <a:spAutoFit/>
+          </a:bodyPr>
+          <a:lstStyle/>
+          <a:p>
+            <a:pPr algn="l">
+              <a:lnSpc>
+                <a:spcPct val="125000"/>
+              </a:lnSpc>
+              <a:spcAft>
+                <a:spcPts val="800"/>
+              </a:spcAft>
+            </a:pPr>
+            <a:r>
+              <a:rPr sz="1300" b="1">
+                <a:solidFill>
+                  <a:srgbClr val="1F2937"/>
+                </a:solidFill>
+                <a:latin typeface="微软雅黑"/>
+                <a:ea typeface="微软雅黑"/>
+              </a:rPr>
+              <a:t>最短板：「分析与总结」</a:t>
+            </a:r>
+          </a:p>
+        </p:txBody>
+      </p:sp>
+      <p:sp>
+        <p:nvSpPr>
+          <p:cNvPr id="22" name="TextBox 21"/>
+          <p:cNvSpPr txBox="1"/>
+          <p:nvPr/>
+        </p:nvSpPr>
+        <p:spPr>
+          <a:xfrm>
+            <a:off x="8284464" y="3794760"/>
+            <a:ext cx="3127248" cy="292608"/>
+          </a:xfrm>
+          <a:prstGeom prst="rect">
+            <a:avLst/>
+          </a:prstGeom>
+          <a:noFill/>
+        </p:spPr>
+        <p:txBody>
+          <a:bodyPr wrap="square" anchor="t" lIns="0" rIns="0" tIns="0" bIns="0">
+            <a:spAutoFit/>
+          </a:bodyPr>
+          <a:lstStyle/>
+          <a:p>
+            <a:pPr algn="l">
+              <a:lnSpc>
+                <a:spcPct val="125000"/>
+              </a:lnSpc>
+              <a:spcAft>
+                <a:spcPts val="800"/>
+              </a:spcAft>
+            </a:pPr>
+            <a:r>
+              <a:rPr sz="1050" b="0">
+                <a:solidFill>
+                  <a:srgbClr val="6B7280"/>
+                </a:solidFill>
+                <a:latin typeface="微软雅黑"/>
+                <a:ea typeface="微软雅黑"/>
+              </a:rPr>
+              <a:t>未拿满 7 份、均分 12.08/20，这就是该占用课堂时间的那一项</a:t>
+            </a:r>
+          </a:p>
+        </p:txBody>
+      </p:sp>
+      <p:sp>
+        <p:nvSpPr>
+          <p:cNvPr id="23" name="Rounded Rectangle 22"/>
+          <p:cNvSpPr/>
+          <p:nvPr/>
+        </p:nvSpPr>
+        <p:spPr>
+          <a:xfrm>
+            <a:off x="566928" y="3977639"/>
+            <a:ext cx="5486400" cy="1737360"/>
+          </a:xfrm>
+          <a:prstGeom prst="roundRect">
+            <a:avLst>
+              <a:gd name="adj" fmla="val 8000"/>
+            </a:avLst>
+          </a:prstGeom>
+          <a:solidFill>
+            <a:srgbClr val="F3F4F6"/>
+          </a:solidFill>
+          <a:ln>
+            <a:noFill/>
+          </a:ln>
+          <a:effectLst/>
+        </p:spPr>
+        <p:style>
+          <a:lnRef idx="1">
+            <a:schemeClr val="accent1"/>
+          </a:lnRef>
+          <a:fillRef idx="3">
+            <a:schemeClr val="accent1"/>
+          </a:fillRef>
+          <a:effectRef idx="2">
+            <a:schemeClr val="accent1"/>
+          </a:effectRef>
+          <a:fontRef idx="minor">
+            <a:schemeClr val="lt1"/>
+          </a:fontRef>
+        </p:style>
+        <p:txBody>
+          <a:bodyPr rtlCol="0" anchor="ctr" wrap="square"/>
+          <a:lstStyle/>
+          <a:p>
+            <a:pPr algn="ctr"/>
+          </a:p>
+        </p:txBody>
+      </p:sp>
+      <p:sp>
+        <p:nvSpPr>
+          <p:cNvPr id="24" name="Rounded Rectangle 23"/>
+          <p:cNvSpPr/>
+          <p:nvPr/>
+        </p:nvSpPr>
+        <p:spPr>
+          <a:xfrm>
+            <a:off x="566928" y="3977639"/>
+            <a:ext cx="50292" cy="1737360"/>
+          </a:xfrm>
+          <a:prstGeom prst="roundRect">
+            <a:avLst>
+              <a:gd name="adj" fmla="val 50000"/>
+            </a:avLst>
+          </a:prstGeom>
+          <a:solidFill>
+            <a:srgbClr val="0F766E"/>
+          </a:solidFill>
+          <a:ln>
+            <a:noFill/>
+          </a:ln>
+          <a:effectLst/>
+        </p:spPr>
+        <p:style>
+          <a:lnRef idx="1">
+            <a:schemeClr val="accent1"/>
+          </a:lnRef>
+          <a:fillRef idx="3">
+            <a:schemeClr val="accent1"/>
+          </a:fillRef>
+          <a:effectRef idx="2">
+            <a:schemeClr val="accent1"/>
+          </a:effectRef>
+          <a:fontRef idx="minor">
+            <a:schemeClr val="lt1"/>
+          </a:fontRef>
+        </p:style>
+        <p:txBody>
+          <a:bodyPr rtlCol="0" anchor="ctr" wrap="square"/>
+          <a:lstStyle/>
+          <a:p>
+            <a:pPr algn="ctr"/>
+          </a:p>
+        </p:txBody>
+      </p:sp>
+      <p:sp>
+        <p:nvSpPr>
+          <p:cNvPr id="25" name="TextBox 24"/>
+          <p:cNvSpPr txBox="1"/>
+          <p:nvPr/>
+        </p:nvSpPr>
+        <p:spPr>
+          <a:xfrm>
+            <a:off x="822960" y="4142231"/>
+            <a:ext cx="5029200" cy="310896"/>
+          </a:xfrm>
+          <a:prstGeom prst="rect">
+            <a:avLst/>
+          </a:prstGeom>
+          <a:noFill/>
+        </p:spPr>
+        <p:txBody>
+          <a:bodyPr wrap="square" anchor="t" lIns="0" rIns="0" tIns="0" bIns="0">
+            <a:spAutoFit/>
+          </a:bodyPr>
+          <a:lstStyle/>
+          <a:p>
+            <a:pPr algn="l">
+              <a:lnSpc>
+                <a:spcPct val="125000"/>
+              </a:lnSpc>
+              <a:spcAft>
+                <a:spcPts val="800"/>
+              </a:spcAft>
+            </a:pPr>
+            <a:r>
+              <a:rPr sz="1500" b="1">
+                <a:solidFill>
+                  <a:srgbClr val="1F2937"/>
+                </a:solidFill>
+                <a:latin typeface="微软雅黑"/>
+                <a:ea typeface="微软雅黑"/>
+              </a:rPr>
+              <a:t>看板给出的四类东西</a:t>
+            </a:r>
+          </a:p>
+        </p:txBody>
+      </p:sp>
+      <p:sp>
+        <p:nvSpPr>
+          <p:cNvPr id="26" name="TextBox 25"/>
+          <p:cNvSpPr txBox="1"/>
+          <p:nvPr/>
+        </p:nvSpPr>
+        <p:spPr>
+          <a:xfrm>
+            <a:off x="822960" y="4471416"/>
+            <a:ext cx="5029200" cy="1078992"/>
+          </a:xfrm>
+          <a:prstGeom prst="rect">
+            <a:avLst/>
+          </a:prstGeom>
+          <a:noFill/>
+        </p:spPr>
+        <p:txBody>
+          <a:bodyPr wrap="square" anchor="t" lIns="0" rIns="0" tIns="0" bIns="0">
+            <a:spAutoFit/>
+          </a:bodyPr>
+          <a:lstStyle/>
+          <a:p>
+            <a:pPr algn="l">
+              <a:lnSpc>
+                <a:spcPct val="125000"/>
+              </a:lnSpc>
+              <a:spcAft>
+                <a:spcPts val="600"/>
+              </a:spcAft>
+            </a:pPr>
+            <a:r>
+              <a:rPr sz="1100" b="0">
+                <a:solidFill>
+                  <a:srgbClr val="1F2937"/>
+                </a:solidFill>
+                <a:latin typeface="微软雅黑"/>
+                <a:ea typeface="微软雅黑"/>
+              </a:rPr>
+              <a:t>共性短板：逐评分点统计拿满/部分/缺失，按薄弱率排序</a:t>
+            </a:r>
+          </a:p>
+          <a:p>
+            <a:pPr algn="l">
+              <a:lnSpc>
+                <a:spcPct val="125000"/>
+              </a:lnSpc>
+              <a:spcAft>
+                <a:spcPts val="600"/>
+              </a:spcAft>
+            </a:pPr>
+            <a:r>
+              <a:rPr sz="1100" b="0">
+                <a:solidFill>
+                  <a:srgbClr val="1F2937"/>
+                </a:solidFill>
+                <a:latin typeface="微软雅黑"/>
+                <a:ea typeface="微软雅黑"/>
+              </a:rPr>
+              <a:t>建议动作：分「课堂教学 / 作业说明 / 评分标准 / 需人工处理」四类</a:t>
+            </a:r>
+          </a:p>
+          <a:p>
+            <a:pPr algn="l">
+              <a:lnSpc>
+                <a:spcPct val="125000"/>
+              </a:lnSpc>
+              <a:spcAft>
+                <a:spcPts val="600"/>
+              </a:spcAft>
+            </a:pPr>
+            <a:r>
+              <a:rPr sz="1100" b="0">
+                <a:solidFill>
+                  <a:srgbClr val="1F2937"/>
+                </a:solidFill>
+                <a:latin typeface="微软雅黑"/>
+                <a:ea typeface="微软雅黑"/>
+              </a:rPr>
+              <a:t>可当范例讲的报告：教学建议要「用达标样本对照」，就先把样本列出来</a:t>
+            </a:r>
+          </a:p>
+          <a:p>
+            <a:pPr algn="l">
+              <a:lnSpc>
+                <a:spcPct val="125000"/>
+              </a:lnSpc>
+              <a:spcAft>
+                <a:spcPts val="600"/>
+              </a:spcAft>
+            </a:pPr>
+            <a:r>
+              <a:rPr sz="1100" b="0">
+                <a:solidFill>
+                  <a:srgbClr val="1F2937"/>
+                </a:solidFill>
+                <a:latin typeface="微软雅黑"/>
+                <a:ea typeface="微软雅黑"/>
+              </a:rPr>
+              <a:t>需要关注的学生：按总分升序，带最弱项与待复核数</a:t>
+            </a:r>
+          </a:p>
+        </p:txBody>
+      </p:sp>
+      <p:sp>
+        <p:nvSpPr>
+          <p:cNvPr id="27" name="Rounded Rectangle 26"/>
+          <p:cNvSpPr/>
+          <p:nvPr/>
+        </p:nvSpPr>
+        <p:spPr>
+          <a:xfrm>
+            <a:off x="6236208" y="3977639"/>
+            <a:ext cx="5394960" cy="1737360"/>
+          </a:xfrm>
+          <a:prstGeom prst="roundRect">
+            <a:avLst>
+              <a:gd name="adj" fmla="val 8000"/>
+            </a:avLst>
+          </a:prstGeom>
+          <a:solidFill>
+            <a:srgbClr val="F3F4F6"/>
+          </a:solidFill>
+          <a:ln>
+            <a:noFill/>
+          </a:ln>
+          <a:effectLst/>
+        </p:spPr>
+        <p:style>
+          <a:lnRef idx="1">
+            <a:schemeClr val="accent1"/>
+          </a:lnRef>
+          <a:fillRef idx="3">
+            <a:schemeClr val="accent1"/>
+          </a:fillRef>
+          <a:effectRef idx="2">
+            <a:schemeClr val="accent1"/>
+          </a:effectRef>
+          <a:fontRef idx="minor">
+            <a:schemeClr val="lt1"/>
+          </a:fontRef>
+        </p:style>
+        <p:txBody>
+          <a:bodyPr rtlCol="0" anchor="ctr" wrap="square"/>
+          <a:lstStyle/>
+          <a:p>
+            <a:pPr algn="ctr"/>
+          </a:p>
+        </p:txBody>
+      </p:sp>
+      <p:sp>
+        <p:nvSpPr>
+          <p:cNvPr id="28" name="Rounded Rectangle 27"/>
+          <p:cNvSpPr/>
+          <p:nvPr/>
+        </p:nvSpPr>
+        <p:spPr>
+          <a:xfrm>
+            <a:off x="6236208" y="3977639"/>
+            <a:ext cx="50292" cy="1737360"/>
+          </a:xfrm>
+          <a:prstGeom prst="roundRect">
+            <a:avLst>
+              <a:gd name="adj" fmla="val 50000"/>
+            </a:avLst>
+          </a:prstGeom>
+          <a:solidFill>
+            <a:srgbClr val="0F766E"/>
+          </a:solidFill>
+          <a:ln>
+            <a:noFill/>
+          </a:ln>
+          <a:effectLst/>
+        </p:spPr>
+        <p:style>
+          <a:lnRef idx="1">
+            <a:schemeClr val="accent1"/>
+          </a:lnRef>
+          <a:fillRef idx="3">
+            <a:schemeClr val="accent1"/>
+          </a:fillRef>
+          <a:effectRef idx="2">
+            <a:schemeClr val="accent1"/>
+          </a:effectRef>
+          <a:fontRef idx="minor">
+            <a:schemeClr val="lt1"/>
+          </a:fontRef>
+        </p:style>
+        <p:txBody>
+          <a:bodyPr rtlCol="0" anchor="ctr" wrap="square"/>
+          <a:lstStyle/>
+          <a:p>
+            <a:pPr algn="ctr"/>
+          </a:p>
+        </p:txBody>
+      </p:sp>
+      <p:sp>
+        <p:nvSpPr>
+          <p:cNvPr id="29" name="TextBox 28"/>
+          <p:cNvSpPr txBox="1"/>
+          <p:nvPr/>
+        </p:nvSpPr>
+        <p:spPr>
+          <a:xfrm>
+            <a:off x="6492240" y="4142231"/>
+            <a:ext cx="4937760" cy="310896"/>
+          </a:xfrm>
+          <a:prstGeom prst="rect">
+            <a:avLst/>
+          </a:prstGeom>
+          <a:noFill/>
+        </p:spPr>
+        <p:txBody>
+          <a:bodyPr wrap="square" anchor="t" lIns="0" rIns="0" tIns="0" bIns="0">
+            <a:spAutoFit/>
+          </a:bodyPr>
+          <a:lstStyle/>
+          <a:p>
+            <a:pPr algn="l">
+              <a:lnSpc>
+                <a:spcPct val="125000"/>
+              </a:lnSpc>
+              <a:spcAft>
+                <a:spcPts val="800"/>
+              </a:spcAft>
+            </a:pPr>
+            <a:r>
+              <a:rPr sz="1500" b="1">
+                <a:solidFill>
+                  <a:srgbClr val="1F2937"/>
+                </a:solidFill>
+                <a:latin typeface="微软雅黑"/>
+                <a:ea typeface="微软雅黑"/>
+              </a:rPr>
+              <a:t>两条纪律（有测试守着）</a:t>
+            </a:r>
+          </a:p>
+        </p:txBody>
+      </p:sp>
+      <p:sp>
+        <p:nvSpPr>
+          <p:cNvPr id="30" name="TextBox 29"/>
+          <p:cNvSpPr txBox="1"/>
+          <p:nvPr/>
+        </p:nvSpPr>
+        <p:spPr>
+          <a:xfrm>
+            <a:off x="6492240" y="4471416"/>
+            <a:ext cx="4937760" cy="1078992"/>
+          </a:xfrm>
+          <a:prstGeom prst="rect">
+            <a:avLst/>
+          </a:prstGeom>
+          <a:noFill/>
+        </p:spPr>
+        <p:txBody>
+          <a:bodyPr wrap="square" anchor="t" lIns="0" rIns="0" tIns="0" bIns="0">
+            <a:spAutoFit/>
+          </a:bodyPr>
+          <a:lstStyle/>
+          <a:p>
+            <a:pPr algn="l">
+              <a:lnSpc>
+                <a:spcPct val="125000"/>
+              </a:lnSpc>
+              <a:spcAft>
+                <a:spcPts val="600"/>
+              </a:spcAft>
+            </a:pPr>
+            <a:r>
+              <a:rPr sz="1100" b="0">
+                <a:solidFill>
+                  <a:srgbClr val="1F2937"/>
+                </a:solidFill>
+                <a:latin typeface="微软雅黑"/>
+                <a:ea typeface="微软雅黑"/>
+              </a:rPr>
+              <a:t>**系统的问题不算到学生头上**：调用失败、召回模式的强制转人工 miss 一律不进「学生没做到」的统计 —— 否则老师会去讲一个其实没问题的知识点</a:t>
+            </a:r>
+          </a:p>
+          <a:p>
+            <a:pPr algn="l">
+              <a:lnSpc>
+                <a:spcPct val="125000"/>
+              </a:lnSpc>
+              <a:spcAft>
+                <a:spcPts val="600"/>
+              </a:spcAft>
+            </a:pPr>
+            <a:r>
+              <a:rPr sz="1100" b="0">
+                <a:solidFill>
+                  <a:srgbClr val="1F2937"/>
+                </a:solidFill>
+                <a:latin typeface="微软雅黑"/>
+                <a:ea typeface="微软雅黑"/>
+              </a:rPr>
+              <a:t>**样本不足就说样本不足**：有效样本 &lt; 8 份时明确提示不要下「这个班普遍如何」的结论</a:t>
+            </a:r>
+          </a:p>
+        </p:txBody>
+      </p:sp>
+      <p:sp>
+        <p:nvSpPr>
+          <p:cNvPr id="31" name="TextBox 30"/>
+          <p:cNvSpPr txBox="1"/>
+          <p:nvPr/>
+        </p:nvSpPr>
+        <p:spPr>
+          <a:xfrm>
+            <a:off x="566928" y="5806440"/>
+            <a:ext cx="11064240" cy="457200"/>
+          </a:xfrm>
+          <a:prstGeom prst="rect">
+            <a:avLst/>
+          </a:prstGeom>
+          <a:noFill/>
+        </p:spPr>
+        <p:txBody>
+          <a:bodyPr wrap="square" anchor="t" lIns="0" rIns="0" tIns="0" bIns="0">
+            <a:spAutoFit/>
+          </a:bodyPr>
+          <a:lstStyle/>
+          <a:p>
+            <a:pPr algn="l">
+              <a:lnSpc>
+                <a:spcPct val="125000"/>
+              </a:lnSpc>
+              <a:spcAft>
+                <a:spcPts val="800"/>
+              </a:spcAft>
+            </a:pPr>
+            <a:r>
+              <a:rPr sz="1200" b="0">
+                <a:solidFill>
+                  <a:srgbClr val="6B7280"/>
+                </a:solidFill>
+                <a:latin typeface="微软雅黑"/>
+                <a:ea typeface="微软雅黑"/>
+              </a:rPr>
+              <a:t>分数来自模型、共性短板来自算术：前者有波动需人工终裁，后者是确定性统计，可以放心拿去做教学决策 —— 这个区分在界面上是分开写的。</a:t>
+            </a:r>
+          </a:p>
+        </p:txBody>
+      </p:sp>
+    </p:spTree>
+  </p:cSld>
+  <p:clrMapOvr>
+    <a:masterClrMapping/>
+  </p:clrMapOvr>
+</p:sld>
+</file>
+
+<file path=ppt/slides/slide9.xml><?xml version="1.0" encoding="utf-8"?>
+<p:sld xmlns:a="http://schemas.openxmlformats.org/drawingml/2006/main" xmlns:p="http://schemas.openxmlformats.org/presentationml/2006/main" xmlns:r="http://schemas.openxmlformats.org/officeDocument/2006/relationships">
+  <p:cSld>
+    <p:spTree>
+      <p:nvGrpSpPr>
+        <p:cNvPr id="1" name=""/>
+        <p:cNvGrpSpPr/>
+        <p:nvPr/>
+      </p:nvGrpSpPr>
+      <p:grpSpPr/>
+      <p:sp>
+        <p:nvSpPr>
+          <p:cNvPr id="2" name="TextBox 1"/>
+          <p:cNvSpPr txBox="1"/>
+          <p:nvPr/>
+        </p:nvSpPr>
+        <p:spPr>
+          <a:xfrm>
+            <a:off x="566928" y="384048"/>
+            <a:ext cx="10515600" cy="274320"/>
+          </a:xfrm>
+          <a:prstGeom prst="rect">
+            <a:avLst/>
+          </a:prstGeom>
+          <a:noFill/>
+        </p:spPr>
+        <p:txBody>
+          <a:bodyPr wrap="square" anchor="t" lIns="0" rIns="0" tIns="0" bIns="0">
+            <a:spAutoFit/>
+          </a:bodyPr>
+          <a:lstStyle/>
+          <a:p>
+            <a:pPr algn="l">
+              <a:lnSpc>
+                <a:spcPct val="125000"/>
+              </a:lnSpc>
+              <a:spcAft>
+                <a:spcPts val="800"/>
+              </a:spcAft>
+            </a:pPr>
+            <a:r>
+              <a:rPr sz="1100" b="1">
+                <a:solidFill>
+                  <a:srgbClr val="0F766E"/>
+                </a:solidFill>
+                <a:latin typeface="微软雅黑"/>
+                <a:ea typeface="微软雅黑"/>
+              </a:rPr>
+              <a:t>08 · AI 工具使用与下一步</a:t>
+            </a:r>
+          </a:p>
+        </p:txBody>
+      </p:sp>
+      <p:sp>
+        <p:nvSpPr>
+          <p:cNvPr id="3" name="TextBox 2"/>
+          <p:cNvSpPr txBox="1"/>
+          <p:nvPr/>
+        </p:nvSpPr>
+        <p:spPr>
+          <a:xfrm>
+            <a:off x="566928" y="676656"/>
+            <a:ext cx="10881360" cy="658368"/>
+          </a:xfrm>
+          <a:prstGeom prst="rect">
+            <a:avLst/>
+          </a:prstGeom>
+          <a:noFill/>
+        </p:spPr>
+        <p:txBody>
+          <a:bodyPr wrap="square" anchor="t" lIns="0" rIns="0" tIns="0" bIns="0">
+            <a:spAutoFit/>
+          </a:bodyPr>
+          <a:lstStyle/>
+          <a:p>
+            <a:pPr algn="l">
+              <a:lnSpc>
+                <a:spcPct val="125000"/>
+              </a:lnSpc>
+              <a:spcAft>
+                <a:spcPts val="800"/>
+              </a:spcAft>
+            </a:pPr>
+            <a:r>
+              <a:rPr sz="2700" b="1">
+                <a:solidFill>
+                  <a:srgbClr val="1F2937"/>
+                </a:solidFill>
+                <a:latin typeface="微软雅黑"/>
+                <a:ea typeface="微软雅黑"/>
+              </a:rPr>
+              <a:t>AI 协作过程、团队与展望</a:t>
+            </a:r>
+          </a:p>
+        </p:txBody>
+      </p:sp>
+      <p:sp>
+        <p:nvSpPr>
+          <p:cNvPr id="4" name="Rounded Rectangle 3"/>
+          <p:cNvSpPr/>
+          <p:nvPr/>
+        </p:nvSpPr>
+        <p:spPr>
+          <a:xfrm>
+            <a:off x="566928" y="1389888"/>
+            <a:ext cx="960120" cy="50292"/>
+          </a:xfrm>
+          <a:prstGeom prst="roundRect">
+            <a:avLst>
+              <a:gd name="adj" fmla="val 50000"/>
+            </a:avLst>
+          </a:prstGeom>
+          <a:solidFill>
+            <a:srgbClr val="0F766E"/>
+          </a:solidFill>
+          <a:ln>
+            <a:noFill/>
+          </a:ln>
+          <a:effectLst/>
+        </p:spPr>
+        <p:style>
+          <a:lnRef idx="1">
+            <a:schemeClr val="accent1"/>
+          </a:lnRef>
+          <a:fillRef idx="3">
+            <a:schemeClr val="accent1"/>
+          </a:fillRef>
+          <a:effectRef idx="2">
+            <a:schemeClr val="accent1"/>
+          </a:effectRef>
+          <a:fontRef idx="minor">
+            <a:schemeClr val="lt1"/>
+          </a:fontRef>
+        </p:style>
+        <p:txBody>
+          <a:bodyPr rtlCol="0" anchor="ctr" wrap="square"/>
+          <a:lstStyle/>
+          <a:p>
+            <a:pPr algn="ctr"/>
+          </a:p>
+        </p:txBody>
+      </p:sp>
+      <p:sp>
+        <p:nvSpPr>
+          <p:cNvPr id="5" name="TextBox 4"/>
+          <p:cNvSpPr txBox="1"/>
+          <p:nvPr/>
+        </p:nvSpPr>
+        <p:spPr>
+          <a:xfrm>
+            <a:off x="566928" y="6327648"/>
+            <a:ext cx="7315200" cy="256032"/>
+          </a:xfrm>
+          <a:prstGeom prst="rect">
+            <a:avLst/>
+          </a:prstGeom>
+          <a:noFill/>
+        </p:spPr>
+        <p:txBody>
+          <a:bodyPr wrap="square" anchor="t" lIns="0" rIns="0" tIns="0" bIns="0">
+            <a:spAutoFit/>
+          </a:bodyPr>
+          <a:lstStyle/>
+          <a:p>
+            <a:pPr algn="l">
+              <a:lnSpc>
+                <a:spcPct val="125000"/>
+              </a:lnSpc>
+              <a:spcAft>
+                <a:spcPts val="800"/>
+              </a:spcAft>
+            </a:pPr>
+            <a:r>
+              <a:rPr sz="1000" b="0">
+                <a:solidFill>
+                  <a:srgbClr val="6B7280"/>
+                </a:solidFill>
+                <a:latin typeface="微软雅黑"/>
+                <a:ea typeface="微软雅黑"/>
+              </a:rPr>
+              <a:t>AutoGrader · RAG-E 四阶判定链 · 每条判定都可溯源到报告原文</a:t>
+            </a:r>
+          </a:p>
+        </p:txBody>
+      </p:sp>
+      <p:sp>
+        <p:nvSpPr>
+          <p:cNvPr id="6" name="TextBox 5"/>
+          <p:cNvSpPr txBox="1"/>
+          <p:nvPr/>
+        </p:nvSpPr>
+        <p:spPr>
+          <a:xfrm>
+            <a:off x="10241280" y="6327648"/>
+            <a:ext cx="1371600" cy="256032"/>
+          </a:xfrm>
+          <a:prstGeom prst="rect">
+            <a:avLst/>
+          </a:prstGeom>
+          <a:noFill/>
+        </p:spPr>
+        <p:txBody>
+          <a:bodyPr wrap="square" anchor="t" lIns="0" rIns="0" tIns="0" bIns="0">
+            <a:spAutoFit/>
+          </a:bodyPr>
+          <a:lstStyle/>
+          <a:p>
+            <a:pPr algn="r">
+              <a:lnSpc>
+                <a:spcPct val="125000"/>
+              </a:lnSpc>
+              <a:spcAft>
+                <a:spcPts val="800"/>
+              </a:spcAft>
+            </a:pPr>
+            <a:r>
+              <a:rPr sz="1000" b="0">
+                <a:solidFill>
+                  <a:srgbClr val="6B7280"/>
+                </a:solidFill>
+                <a:latin typeface="微软雅黑"/>
+                <a:ea typeface="微软雅黑"/>
+              </a:rPr>
+              <a:t>09 / 09</a:t>
             </a:r>
           </a:p>
         </p:txBody>

--- a/AutoGrader-参赛答辩.pptx
+++ b/AutoGrader-参赛答辩.pptx
@@ -14,6 +14,7 @@
     <p:sldId id="262" r:id="rId13"/>
     <p:sldId id="263" r:id="rId14"/>
     <p:sldId id="264" r:id="rId15"/>
+    <p:sldId id="265" r:id="rId16"/>
   </p:sldIdLst>
   <p:sldSz cx="12191695" cy="6858000" type="screen4x3"/>
   <p:notesSz cx="6858000" cy="9144000"/>
@@ -3741,6 +3742,1177 @@
 </p:sld>
 </file>
 
+<file path=ppt/slides/slide10.xml><?xml version="1.0" encoding="utf-8"?>
+<p:sld xmlns:a="http://schemas.openxmlformats.org/drawingml/2006/main" xmlns:p="http://schemas.openxmlformats.org/presentationml/2006/main" xmlns:r="http://schemas.openxmlformats.org/officeDocument/2006/relationships">
+  <p:cSld>
+    <p:spTree>
+      <p:nvGrpSpPr>
+        <p:cNvPr id="1" name=""/>
+        <p:cNvGrpSpPr/>
+        <p:nvPr/>
+      </p:nvGrpSpPr>
+      <p:grpSpPr/>
+      <p:sp>
+        <p:nvSpPr>
+          <p:cNvPr id="2" name="TextBox 1"/>
+          <p:cNvSpPr txBox="1"/>
+          <p:nvPr/>
+        </p:nvSpPr>
+        <p:spPr>
+          <a:xfrm>
+            <a:off x="566928" y="384048"/>
+            <a:ext cx="10515600" cy="274320"/>
+          </a:xfrm>
+          <a:prstGeom prst="rect">
+            <a:avLst/>
+          </a:prstGeom>
+          <a:noFill/>
+        </p:spPr>
+        <p:txBody>
+          <a:bodyPr wrap="square" anchor="t" lIns="0" rIns="0" tIns="0" bIns="0">
+            <a:spAutoFit/>
+          </a:bodyPr>
+          <a:lstStyle/>
+          <a:p>
+            <a:pPr algn="l">
+              <a:lnSpc>
+                <a:spcPct val="125000"/>
+              </a:lnSpc>
+              <a:spcAft>
+                <a:spcPts val="800"/>
+              </a:spcAft>
+            </a:pPr>
+            <a:r>
+              <a:rPr sz="1100" b="1">
+                <a:solidFill>
+                  <a:srgbClr val="0F766E"/>
+                </a:solidFill>
+                <a:latin typeface="微软雅黑"/>
+                <a:ea typeface="微软雅黑"/>
+              </a:rPr>
+              <a:t>09 · AI 工具使用与下一步</a:t>
+            </a:r>
+          </a:p>
+        </p:txBody>
+      </p:sp>
+      <p:sp>
+        <p:nvSpPr>
+          <p:cNvPr id="3" name="TextBox 2"/>
+          <p:cNvSpPr txBox="1"/>
+          <p:nvPr/>
+        </p:nvSpPr>
+        <p:spPr>
+          <a:xfrm>
+            <a:off x="566928" y="676656"/>
+            <a:ext cx="10881360" cy="658368"/>
+          </a:xfrm>
+          <a:prstGeom prst="rect">
+            <a:avLst/>
+          </a:prstGeom>
+          <a:noFill/>
+        </p:spPr>
+        <p:txBody>
+          <a:bodyPr wrap="square" anchor="t" lIns="0" rIns="0" tIns="0" bIns="0">
+            <a:spAutoFit/>
+          </a:bodyPr>
+          <a:lstStyle/>
+          <a:p>
+            <a:pPr algn="l">
+              <a:lnSpc>
+                <a:spcPct val="125000"/>
+              </a:lnSpc>
+              <a:spcAft>
+                <a:spcPts val="800"/>
+              </a:spcAft>
+            </a:pPr>
+            <a:r>
+              <a:rPr sz="2700" b="1">
+                <a:solidFill>
+                  <a:srgbClr val="1F2937"/>
+                </a:solidFill>
+                <a:latin typeface="微软雅黑"/>
+                <a:ea typeface="微软雅黑"/>
+              </a:rPr>
+              <a:t>AI 协作过程、团队与展望</a:t>
+            </a:r>
+          </a:p>
+        </p:txBody>
+      </p:sp>
+      <p:sp>
+        <p:nvSpPr>
+          <p:cNvPr id="4" name="Rounded Rectangle 3"/>
+          <p:cNvSpPr/>
+          <p:nvPr/>
+        </p:nvSpPr>
+        <p:spPr>
+          <a:xfrm>
+            <a:off x="566928" y="1389888"/>
+            <a:ext cx="960120" cy="50292"/>
+          </a:xfrm>
+          <a:prstGeom prst="roundRect">
+            <a:avLst>
+              <a:gd name="adj" fmla="val 50000"/>
+            </a:avLst>
+          </a:prstGeom>
+          <a:solidFill>
+            <a:srgbClr val="0F766E"/>
+          </a:solidFill>
+          <a:ln>
+            <a:noFill/>
+          </a:ln>
+          <a:effectLst/>
+        </p:spPr>
+        <p:style>
+          <a:lnRef idx="1">
+            <a:schemeClr val="accent1"/>
+          </a:lnRef>
+          <a:fillRef idx="3">
+            <a:schemeClr val="accent1"/>
+          </a:fillRef>
+          <a:effectRef idx="2">
+            <a:schemeClr val="accent1"/>
+          </a:effectRef>
+          <a:fontRef idx="minor">
+            <a:schemeClr val="lt1"/>
+          </a:fontRef>
+        </p:style>
+        <p:txBody>
+          <a:bodyPr rtlCol="0" anchor="ctr" wrap="square"/>
+          <a:lstStyle/>
+          <a:p>
+            <a:pPr algn="ctr"/>
+          </a:p>
+        </p:txBody>
+      </p:sp>
+      <p:sp>
+        <p:nvSpPr>
+          <p:cNvPr id="5" name="TextBox 4"/>
+          <p:cNvSpPr txBox="1"/>
+          <p:nvPr/>
+        </p:nvSpPr>
+        <p:spPr>
+          <a:xfrm>
+            <a:off x="566928" y="6327648"/>
+            <a:ext cx="7315200" cy="256032"/>
+          </a:xfrm>
+          <a:prstGeom prst="rect">
+            <a:avLst/>
+          </a:prstGeom>
+          <a:noFill/>
+        </p:spPr>
+        <p:txBody>
+          <a:bodyPr wrap="square" anchor="t" lIns="0" rIns="0" tIns="0" bIns="0">
+            <a:spAutoFit/>
+          </a:bodyPr>
+          <a:lstStyle/>
+          <a:p>
+            <a:pPr algn="l">
+              <a:lnSpc>
+                <a:spcPct val="125000"/>
+              </a:lnSpc>
+              <a:spcAft>
+                <a:spcPts val="800"/>
+              </a:spcAft>
+            </a:pPr>
+            <a:r>
+              <a:rPr sz="1000" b="0">
+                <a:solidFill>
+                  <a:srgbClr val="6B7280"/>
+                </a:solidFill>
+                <a:latin typeface="微软雅黑"/>
+                <a:ea typeface="微软雅黑"/>
+              </a:rPr>
+              <a:t>AutoGrader · RAG-E 四阶判定链 · 每条判定都可溯源到报告原文</a:t>
+            </a:r>
+          </a:p>
+        </p:txBody>
+      </p:sp>
+      <p:sp>
+        <p:nvSpPr>
+          <p:cNvPr id="6" name="TextBox 5"/>
+          <p:cNvSpPr txBox="1"/>
+          <p:nvPr/>
+        </p:nvSpPr>
+        <p:spPr>
+          <a:xfrm>
+            <a:off x="10241280" y="6327648"/>
+            <a:ext cx="1371600" cy="256032"/>
+          </a:xfrm>
+          <a:prstGeom prst="rect">
+            <a:avLst/>
+          </a:prstGeom>
+          <a:noFill/>
+        </p:spPr>
+        <p:txBody>
+          <a:bodyPr wrap="square" anchor="t" lIns="0" rIns="0" tIns="0" bIns="0">
+            <a:spAutoFit/>
+          </a:bodyPr>
+          <a:lstStyle/>
+          <a:p>
+            <a:pPr algn="r">
+              <a:lnSpc>
+                <a:spcPct val="125000"/>
+              </a:lnSpc>
+              <a:spcAft>
+                <a:spcPts val="800"/>
+              </a:spcAft>
+            </a:pPr>
+            <a:r>
+              <a:rPr sz="1000" b="0">
+                <a:solidFill>
+                  <a:srgbClr val="6B7280"/>
+                </a:solidFill>
+                <a:latin typeface="微软雅黑"/>
+                <a:ea typeface="微软雅黑"/>
+              </a:rPr>
+              <a:t>10 / 10</a:t>
+            </a:r>
+          </a:p>
+        </p:txBody>
+      </p:sp>
+      <p:sp>
+        <p:nvSpPr>
+          <p:cNvPr id="7" name="Rounded Rectangle 6"/>
+          <p:cNvSpPr/>
+          <p:nvPr/>
+        </p:nvSpPr>
+        <p:spPr>
+          <a:xfrm>
+            <a:off x="566928" y="1572768"/>
+            <a:ext cx="5486400" cy="2103120"/>
+          </a:xfrm>
+          <a:prstGeom prst="roundRect">
+            <a:avLst>
+              <a:gd name="adj" fmla="val 8000"/>
+            </a:avLst>
+          </a:prstGeom>
+          <a:solidFill>
+            <a:srgbClr val="F3F4F6"/>
+          </a:solidFill>
+          <a:ln>
+            <a:noFill/>
+          </a:ln>
+          <a:effectLst/>
+        </p:spPr>
+        <p:style>
+          <a:lnRef idx="1">
+            <a:schemeClr val="accent1"/>
+          </a:lnRef>
+          <a:fillRef idx="3">
+            <a:schemeClr val="accent1"/>
+          </a:fillRef>
+          <a:effectRef idx="2">
+            <a:schemeClr val="accent1"/>
+          </a:effectRef>
+          <a:fontRef idx="minor">
+            <a:schemeClr val="lt1"/>
+          </a:fontRef>
+        </p:style>
+        <p:txBody>
+          <a:bodyPr rtlCol="0" anchor="ctr" wrap="square"/>
+          <a:lstStyle/>
+          <a:p>
+            <a:pPr algn="ctr"/>
+          </a:p>
+        </p:txBody>
+      </p:sp>
+      <p:sp>
+        <p:nvSpPr>
+          <p:cNvPr id="8" name="Rounded Rectangle 7"/>
+          <p:cNvSpPr/>
+          <p:nvPr/>
+        </p:nvSpPr>
+        <p:spPr>
+          <a:xfrm>
+            <a:off x="566928" y="1572768"/>
+            <a:ext cx="50292" cy="2103120"/>
+          </a:xfrm>
+          <a:prstGeom prst="roundRect">
+            <a:avLst>
+              <a:gd name="adj" fmla="val 50000"/>
+            </a:avLst>
+          </a:prstGeom>
+          <a:solidFill>
+            <a:srgbClr val="B45309"/>
+          </a:solidFill>
+          <a:ln>
+            <a:noFill/>
+          </a:ln>
+          <a:effectLst/>
+        </p:spPr>
+        <p:style>
+          <a:lnRef idx="1">
+            <a:schemeClr val="accent1"/>
+          </a:lnRef>
+          <a:fillRef idx="3">
+            <a:schemeClr val="accent1"/>
+          </a:fillRef>
+          <a:effectRef idx="2">
+            <a:schemeClr val="accent1"/>
+          </a:effectRef>
+          <a:fontRef idx="minor">
+            <a:schemeClr val="lt1"/>
+          </a:fontRef>
+        </p:style>
+        <p:txBody>
+          <a:bodyPr rtlCol="0" anchor="ctr" wrap="square"/>
+          <a:lstStyle/>
+          <a:p>
+            <a:pPr algn="ctr"/>
+          </a:p>
+        </p:txBody>
+      </p:sp>
+      <p:sp>
+        <p:nvSpPr>
+          <p:cNvPr id="9" name="TextBox 8"/>
+          <p:cNvSpPr txBox="1"/>
+          <p:nvPr/>
+        </p:nvSpPr>
+        <p:spPr>
+          <a:xfrm>
+            <a:off x="822960" y="1737360"/>
+            <a:ext cx="5029200" cy="310896"/>
+          </a:xfrm>
+          <a:prstGeom prst="rect">
+            <a:avLst/>
+          </a:prstGeom>
+          <a:noFill/>
+        </p:spPr>
+        <p:txBody>
+          <a:bodyPr wrap="square" anchor="t" lIns="0" rIns="0" tIns="0" bIns="0">
+            <a:spAutoFit/>
+          </a:bodyPr>
+          <a:lstStyle/>
+          <a:p>
+            <a:pPr algn="l">
+              <a:lnSpc>
+                <a:spcPct val="125000"/>
+              </a:lnSpc>
+              <a:spcAft>
+                <a:spcPts val="800"/>
+              </a:spcAft>
+            </a:pPr>
+            <a:r>
+              <a:rPr sz="1500" b="1">
+                <a:solidFill>
+                  <a:srgbClr val="B45309"/>
+                </a:solidFill>
+                <a:latin typeface="微软雅黑"/>
+                <a:ea typeface="微软雅黑"/>
+              </a:rPr>
+              <a:t>AI 帮我们抓到的两个真实缺陷</a:t>
+            </a:r>
+          </a:p>
+        </p:txBody>
+      </p:sp>
+      <p:sp>
+        <p:nvSpPr>
+          <p:cNvPr id="10" name="TextBox 9"/>
+          <p:cNvSpPr txBox="1"/>
+          <p:nvPr/>
+        </p:nvSpPr>
+        <p:spPr>
+          <a:xfrm>
+            <a:off x="822960" y="2066543"/>
+            <a:ext cx="5029200" cy="1444751"/>
+          </a:xfrm>
+          <a:prstGeom prst="rect">
+            <a:avLst/>
+          </a:prstGeom>
+          <a:noFill/>
+        </p:spPr>
+        <p:txBody>
+          <a:bodyPr wrap="square" anchor="t" lIns="0" rIns="0" tIns="0" bIns="0">
+            <a:spAutoFit/>
+          </a:bodyPr>
+          <a:lstStyle/>
+          <a:p>
+            <a:pPr algn="l">
+              <a:lnSpc>
+                <a:spcPct val="125000"/>
+              </a:lnSpc>
+              <a:spcAft>
+                <a:spcPts val="600"/>
+              </a:spcAft>
+            </a:pPr>
+            <a:r>
+              <a:rPr sz="1200" b="0">
+                <a:solidFill>
+                  <a:srgbClr val="1F2937"/>
+                </a:solidFill>
+                <a:latin typeface="微软雅黑"/>
+                <a:ea typeface="微软雅黑"/>
+              </a:rPr>
+              <a:t>① 上下文丢失：模型只看到报告 7%~11% 内容（MAE 31.67 → 20.44）</a:t>
+            </a:r>
+          </a:p>
+          <a:p>
+            <a:pPr algn="l">
+              <a:lnSpc>
+                <a:spcPct val="125000"/>
+              </a:lnSpc>
+              <a:spcAft>
+                <a:spcPts val="600"/>
+              </a:spcAft>
+            </a:pPr>
+            <a:r>
+              <a:rPr sz="1200" b="0">
+                <a:solidFill>
+                  <a:srgbClr val="1F2937"/>
+                </a:solidFill>
+                <a:latin typeface="微软雅黑"/>
+                <a:ea typeface="微软雅黑"/>
+              </a:rPr>
+              <a:t>② 反馈生成失败：异常被 except 吞掉，查不到原因；最后靠另一项功能测试才炸出真凶——输出的 JSON 含未转义引号</a:t>
+            </a:r>
+          </a:p>
+          <a:p>
+            <a:pPr algn="l">
+              <a:lnSpc>
+                <a:spcPct val="125000"/>
+              </a:lnSpc>
+              <a:spcAft>
+                <a:spcPts val="600"/>
+              </a:spcAft>
+            </a:pPr>
+            <a:r>
+              <a:rPr sz="1200" b="0">
+                <a:solidFill>
+                  <a:srgbClr val="1F2937"/>
+                </a:solidFill>
+                <a:latin typeface="微软雅黑"/>
+                <a:ea typeface="微软雅黑"/>
+              </a:rPr>
+              <a:t>两篇排查记录都在仓库 docs/ 下，是当时写下的，不是事后美化</a:t>
+            </a:r>
+          </a:p>
+        </p:txBody>
+      </p:sp>
+      <p:sp>
+        <p:nvSpPr>
+          <p:cNvPr id="11" name="Rounded Rectangle 10"/>
+          <p:cNvSpPr/>
+          <p:nvPr/>
+        </p:nvSpPr>
+        <p:spPr>
+          <a:xfrm>
+            <a:off x="6236208" y="1572768"/>
+            <a:ext cx="5394960" cy="2103120"/>
+          </a:xfrm>
+          <a:prstGeom prst="roundRect">
+            <a:avLst>
+              <a:gd name="adj" fmla="val 8000"/>
+            </a:avLst>
+          </a:prstGeom>
+          <a:solidFill>
+            <a:srgbClr val="F3F4F6"/>
+          </a:solidFill>
+          <a:ln>
+            <a:noFill/>
+          </a:ln>
+          <a:effectLst/>
+        </p:spPr>
+        <p:style>
+          <a:lnRef idx="1">
+            <a:schemeClr val="accent1"/>
+          </a:lnRef>
+          <a:fillRef idx="3">
+            <a:schemeClr val="accent1"/>
+          </a:fillRef>
+          <a:effectRef idx="2">
+            <a:schemeClr val="accent1"/>
+          </a:effectRef>
+          <a:fontRef idx="minor">
+            <a:schemeClr val="lt1"/>
+          </a:fontRef>
+        </p:style>
+        <p:txBody>
+          <a:bodyPr rtlCol="0" anchor="ctr" wrap="square"/>
+          <a:lstStyle/>
+          <a:p>
+            <a:pPr algn="ctr"/>
+          </a:p>
+        </p:txBody>
+      </p:sp>
+      <p:sp>
+        <p:nvSpPr>
+          <p:cNvPr id="12" name="Rounded Rectangle 11"/>
+          <p:cNvSpPr/>
+          <p:nvPr/>
+        </p:nvSpPr>
+        <p:spPr>
+          <a:xfrm>
+            <a:off x="6236208" y="1572768"/>
+            <a:ext cx="50292" cy="2103120"/>
+          </a:xfrm>
+          <a:prstGeom prst="roundRect">
+            <a:avLst>
+              <a:gd name="adj" fmla="val 50000"/>
+            </a:avLst>
+          </a:prstGeom>
+          <a:solidFill>
+            <a:srgbClr val="0F766E"/>
+          </a:solidFill>
+          <a:ln>
+            <a:noFill/>
+          </a:ln>
+          <a:effectLst/>
+        </p:spPr>
+        <p:style>
+          <a:lnRef idx="1">
+            <a:schemeClr val="accent1"/>
+          </a:lnRef>
+          <a:fillRef idx="3">
+            <a:schemeClr val="accent1"/>
+          </a:fillRef>
+          <a:effectRef idx="2">
+            <a:schemeClr val="accent1"/>
+          </a:effectRef>
+          <a:fontRef idx="minor">
+            <a:schemeClr val="lt1"/>
+          </a:fontRef>
+        </p:style>
+        <p:txBody>
+          <a:bodyPr rtlCol="0" anchor="ctr" wrap="square"/>
+          <a:lstStyle/>
+          <a:p>
+            <a:pPr algn="ctr"/>
+          </a:p>
+        </p:txBody>
+      </p:sp>
+      <p:sp>
+        <p:nvSpPr>
+          <p:cNvPr id="13" name="TextBox 12"/>
+          <p:cNvSpPr txBox="1"/>
+          <p:nvPr/>
+        </p:nvSpPr>
+        <p:spPr>
+          <a:xfrm>
+            <a:off x="6492240" y="1737360"/>
+            <a:ext cx="4937760" cy="310896"/>
+          </a:xfrm>
+          <a:prstGeom prst="rect">
+            <a:avLst/>
+          </a:prstGeom>
+          <a:noFill/>
+        </p:spPr>
+        <p:txBody>
+          <a:bodyPr wrap="square" anchor="t" lIns="0" rIns="0" tIns="0" bIns="0">
+            <a:spAutoFit/>
+          </a:bodyPr>
+          <a:lstStyle/>
+          <a:p>
+            <a:pPr algn="l">
+              <a:lnSpc>
+                <a:spcPct val="125000"/>
+              </a:lnSpc>
+              <a:spcAft>
+                <a:spcPts val="800"/>
+              </a:spcAft>
+            </a:pPr>
+            <a:r>
+              <a:rPr sz="1500" b="1">
+                <a:solidFill>
+                  <a:srgbClr val="1F2937"/>
+                </a:solidFill>
+                <a:latin typeface="微软雅黑"/>
+                <a:ea typeface="微软雅黑"/>
+              </a:rPr>
+              <a:t>AI 在工程里的位置</a:t>
+            </a:r>
+          </a:p>
+        </p:txBody>
+      </p:sp>
+      <p:sp>
+        <p:nvSpPr>
+          <p:cNvPr id="14" name="TextBox 13"/>
+          <p:cNvSpPr txBox="1"/>
+          <p:nvPr/>
+        </p:nvSpPr>
+        <p:spPr>
+          <a:xfrm>
+            <a:off x="6492240" y="2066543"/>
+            <a:ext cx="4937760" cy="1444751"/>
+          </a:xfrm>
+          <a:prstGeom prst="rect">
+            <a:avLst/>
+          </a:prstGeom>
+          <a:noFill/>
+        </p:spPr>
+        <p:txBody>
+          <a:bodyPr wrap="square" anchor="t" lIns="0" rIns="0" tIns="0" bIns="0">
+            <a:spAutoFit/>
+          </a:bodyPr>
+          <a:lstStyle/>
+          <a:p>
+            <a:pPr algn="l">
+              <a:lnSpc>
+                <a:spcPct val="125000"/>
+              </a:lnSpc>
+              <a:spcAft>
+                <a:spcPts val="600"/>
+              </a:spcAft>
+            </a:pPr>
+            <a:r>
+              <a:rPr sz="1200" b="0">
+                <a:solidFill>
+                  <a:srgbClr val="1F2937"/>
+                </a:solidFill>
+                <a:latin typeface="微软雅黑"/>
+                <a:ea typeface="微软雅黑"/>
+              </a:rPr>
+              <a:t>代码骨架、prompt 初稿、界面实现由 AI 协作产出</a:t>
+            </a:r>
+          </a:p>
+          <a:p>
+            <a:pPr algn="l">
+              <a:lnSpc>
+                <a:spcPct val="125000"/>
+              </a:lnSpc>
+              <a:spcAft>
+                <a:spcPts val="600"/>
+              </a:spcAft>
+            </a:pPr>
+            <a:r>
+              <a:rPr sz="1200" b="0">
+                <a:solidFill>
+                  <a:srgbClr val="1F2937"/>
+                </a:solidFill>
+                <a:latin typeface="微软雅黑"/>
+                <a:ea typeface="微软雅黑"/>
+              </a:rPr>
+              <a:t>判定规则、评分点定义、gold set 打分由人完成</a:t>
+            </a:r>
+          </a:p>
+          <a:p>
+            <a:pPr algn="l">
+              <a:lnSpc>
+                <a:spcPct val="125000"/>
+              </a:lnSpc>
+              <a:spcAft>
+                <a:spcPts val="600"/>
+              </a:spcAft>
+            </a:pPr>
+            <a:r>
+              <a:rPr sz="1200" b="0">
+                <a:solidFill>
+                  <a:srgbClr val="1F2937"/>
+                </a:solidFill>
+                <a:latin typeface="微软雅黑"/>
+                <a:ea typeface="微软雅黑"/>
+              </a:rPr>
+              <a:t>「不许吞异常」「不许放宽匹配规则」是我们给自己立的规矩</a:t>
+            </a:r>
+          </a:p>
+        </p:txBody>
+      </p:sp>
+      <p:sp>
+        <p:nvSpPr>
+          <p:cNvPr id="15" name="Rounded Rectangle 14"/>
+          <p:cNvSpPr/>
+          <p:nvPr/>
+        </p:nvSpPr>
+        <p:spPr>
+          <a:xfrm>
+            <a:off x="566928" y="3822191"/>
+            <a:ext cx="5486400" cy="1795018"/>
+          </a:xfrm>
+          <a:prstGeom prst="roundRect">
+            <a:avLst>
+              <a:gd name="adj" fmla="val 8000"/>
+            </a:avLst>
+          </a:prstGeom>
+          <a:solidFill>
+            <a:srgbClr val="F3F4F6"/>
+          </a:solidFill>
+          <a:ln>
+            <a:noFill/>
+          </a:ln>
+          <a:effectLst/>
+        </p:spPr>
+        <p:style>
+          <a:lnRef idx="1">
+            <a:schemeClr val="accent1"/>
+          </a:lnRef>
+          <a:fillRef idx="3">
+            <a:schemeClr val="accent1"/>
+          </a:fillRef>
+          <a:effectRef idx="2">
+            <a:schemeClr val="accent1"/>
+          </a:effectRef>
+          <a:fontRef idx="minor">
+            <a:schemeClr val="lt1"/>
+          </a:fontRef>
+        </p:style>
+        <p:txBody>
+          <a:bodyPr rtlCol="0" anchor="ctr" wrap="square"/>
+          <a:lstStyle/>
+          <a:p>
+            <a:pPr algn="ctr"/>
+          </a:p>
+        </p:txBody>
+      </p:sp>
+      <p:sp>
+        <p:nvSpPr>
+          <p:cNvPr id="16" name="Rounded Rectangle 15"/>
+          <p:cNvSpPr/>
+          <p:nvPr/>
+        </p:nvSpPr>
+        <p:spPr>
+          <a:xfrm>
+            <a:off x="566928" y="3822191"/>
+            <a:ext cx="50292" cy="1795018"/>
+          </a:xfrm>
+          <a:prstGeom prst="roundRect">
+            <a:avLst>
+              <a:gd name="adj" fmla="val 50000"/>
+            </a:avLst>
+          </a:prstGeom>
+          <a:solidFill>
+            <a:srgbClr val="0F766E"/>
+          </a:solidFill>
+          <a:ln>
+            <a:noFill/>
+          </a:ln>
+          <a:effectLst/>
+        </p:spPr>
+        <p:style>
+          <a:lnRef idx="1">
+            <a:schemeClr val="accent1"/>
+          </a:lnRef>
+          <a:fillRef idx="3">
+            <a:schemeClr val="accent1"/>
+          </a:fillRef>
+          <a:effectRef idx="2">
+            <a:schemeClr val="accent1"/>
+          </a:effectRef>
+          <a:fontRef idx="minor">
+            <a:schemeClr val="lt1"/>
+          </a:fontRef>
+        </p:style>
+        <p:txBody>
+          <a:bodyPr rtlCol="0" anchor="ctr" wrap="square"/>
+          <a:lstStyle/>
+          <a:p>
+            <a:pPr algn="ctr"/>
+          </a:p>
+        </p:txBody>
+      </p:sp>
+      <p:sp>
+        <p:nvSpPr>
+          <p:cNvPr id="17" name="TextBox 16"/>
+          <p:cNvSpPr txBox="1"/>
+          <p:nvPr/>
+        </p:nvSpPr>
+        <p:spPr>
+          <a:xfrm>
+            <a:off x="822960" y="3986783"/>
+            <a:ext cx="5029200" cy="310896"/>
+          </a:xfrm>
+          <a:prstGeom prst="rect">
+            <a:avLst/>
+          </a:prstGeom>
+          <a:noFill/>
+        </p:spPr>
+        <p:txBody>
+          <a:bodyPr wrap="square" anchor="t" lIns="0" rIns="0" tIns="0" bIns="0">
+            <a:spAutoFit/>
+          </a:bodyPr>
+          <a:lstStyle/>
+          <a:p>
+            <a:pPr algn="l">
+              <a:lnSpc>
+                <a:spcPct val="125000"/>
+              </a:lnSpc>
+              <a:spcAft>
+                <a:spcPts val="800"/>
+              </a:spcAft>
+            </a:pPr>
+            <a:r>
+              <a:rPr sz="1500" b="1">
+                <a:solidFill>
+                  <a:srgbClr val="1F2937"/>
+                </a:solidFill>
+                <a:latin typeface="微软雅黑"/>
+                <a:ea typeface="微软雅黑"/>
+              </a:rPr>
+              <a:t>团队与分工（2 人，均为计算机科学与技术专业）</a:t>
+            </a:r>
+          </a:p>
+        </p:txBody>
+      </p:sp>
+      <p:sp>
+        <p:nvSpPr>
+          <p:cNvPr id="18" name="TextBox 17"/>
+          <p:cNvSpPr txBox="1"/>
+          <p:nvPr/>
+        </p:nvSpPr>
+        <p:spPr>
+          <a:xfrm>
+            <a:off x="822960" y="4315968"/>
+            <a:ext cx="5029200" cy="1136650"/>
+          </a:xfrm>
+          <a:prstGeom prst="rect">
+            <a:avLst/>
+          </a:prstGeom>
+          <a:noFill/>
+        </p:spPr>
+        <p:txBody>
+          <a:bodyPr wrap="square" anchor="t" lIns="0" rIns="0" tIns="0" bIns="0">
+            <a:spAutoFit/>
+          </a:bodyPr>
+          <a:lstStyle/>
+          <a:p>
+            <a:pPr algn="l">
+              <a:lnSpc>
+                <a:spcPct val="125000"/>
+              </a:lnSpc>
+              <a:spcAft>
+                <a:spcPts val="600"/>
+              </a:spcAft>
+            </a:pPr>
+            <a:r>
+              <a:rPr sz="1100" b="0">
+                <a:solidFill>
+                  <a:srgbClr val="1F2937"/>
+                </a:solidFill>
+                <a:latin typeface="微软雅黑"/>
+                <a:ea typeface="微软雅黑"/>
+              </a:rPr>
+              <a:t>黄宇科（主程）：代码 / 部署 / 版本管理 / 自评测工具</a:t>
+            </a:r>
+          </a:p>
+          <a:p>
+            <a:pPr algn="l">
+              <a:lnSpc>
+                <a:spcPct val="125000"/>
+              </a:lnSpc>
+              <a:spcAft>
+                <a:spcPts val="600"/>
+              </a:spcAft>
+            </a:pPr>
+            <a:r>
+              <a:rPr sz="1100" b="0">
+                <a:solidFill>
+                  <a:srgbClr val="1F2937"/>
+                </a:solidFill>
+                <a:latin typeface="微软雅黑"/>
+                <a:ea typeface="微软雅黑"/>
+              </a:rPr>
+              <a:t>张镒川（产品与材料）：报告脱敏 / 评分点整理 / 独立人工打分 / 试用 / PPT / 视频</a:t>
+            </a:r>
+          </a:p>
+          <a:p>
+            <a:pPr algn="l">
+              <a:lnSpc>
+                <a:spcPct val="125000"/>
+              </a:lnSpc>
+              <a:spcAft>
+                <a:spcPts val="600"/>
+              </a:spcAft>
+            </a:pPr>
+            <a:r>
+              <a:rPr sz="1100" b="0">
+                <a:solidFill>
+                  <a:srgbClr val="1F2937"/>
+                </a:solidFill>
+                <a:latin typeface="微软雅黑"/>
+                <a:ea typeface="微软雅黑"/>
+              </a:rPr>
+              <a:t>深圳大学计算机与软件学院 · 计算机科学与技术 · 2025 级 05 班</a:t>
+            </a:r>
+          </a:p>
+        </p:txBody>
+      </p:sp>
+      <p:sp>
+        <p:nvSpPr>
+          <p:cNvPr id="19" name="Rounded Rectangle 18"/>
+          <p:cNvSpPr/>
+          <p:nvPr/>
+        </p:nvSpPr>
+        <p:spPr>
+          <a:xfrm>
+            <a:off x="6236208" y="3822191"/>
+            <a:ext cx="5394960" cy="1646428"/>
+          </a:xfrm>
+          <a:prstGeom prst="roundRect">
+            <a:avLst>
+              <a:gd name="adj" fmla="val 8000"/>
+            </a:avLst>
+          </a:prstGeom>
+          <a:solidFill>
+            <a:srgbClr val="F3F4F6"/>
+          </a:solidFill>
+          <a:ln>
+            <a:noFill/>
+          </a:ln>
+          <a:effectLst/>
+        </p:spPr>
+        <p:style>
+          <a:lnRef idx="1">
+            <a:schemeClr val="accent1"/>
+          </a:lnRef>
+          <a:fillRef idx="3">
+            <a:schemeClr val="accent1"/>
+          </a:fillRef>
+          <a:effectRef idx="2">
+            <a:schemeClr val="accent1"/>
+          </a:effectRef>
+          <a:fontRef idx="minor">
+            <a:schemeClr val="lt1"/>
+          </a:fontRef>
+        </p:style>
+        <p:txBody>
+          <a:bodyPr rtlCol="0" anchor="ctr" wrap="square"/>
+          <a:lstStyle/>
+          <a:p>
+            <a:pPr algn="ctr"/>
+          </a:p>
+        </p:txBody>
+      </p:sp>
+      <p:sp>
+        <p:nvSpPr>
+          <p:cNvPr id="20" name="Rounded Rectangle 19"/>
+          <p:cNvSpPr/>
+          <p:nvPr/>
+        </p:nvSpPr>
+        <p:spPr>
+          <a:xfrm>
+            <a:off x="6236208" y="3822191"/>
+            <a:ext cx="50292" cy="1646428"/>
+          </a:xfrm>
+          <a:prstGeom prst="roundRect">
+            <a:avLst>
+              <a:gd name="adj" fmla="val 50000"/>
+            </a:avLst>
+          </a:prstGeom>
+          <a:solidFill>
+            <a:srgbClr val="0F766E"/>
+          </a:solidFill>
+          <a:ln>
+            <a:noFill/>
+          </a:ln>
+          <a:effectLst/>
+        </p:spPr>
+        <p:style>
+          <a:lnRef idx="1">
+            <a:schemeClr val="accent1"/>
+          </a:lnRef>
+          <a:fillRef idx="3">
+            <a:schemeClr val="accent1"/>
+          </a:fillRef>
+          <a:effectRef idx="2">
+            <a:schemeClr val="accent1"/>
+          </a:effectRef>
+          <a:fontRef idx="minor">
+            <a:schemeClr val="lt1"/>
+          </a:fontRef>
+        </p:style>
+        <p:txBody>
+          <a:bodyPr rtlCol="0" anchor="ctr" wrap="square"/>
+          <a:lstStyle/>
+          <a:p>
+            <a:pPr algn="ctr"/>
+          </a:p>
+        </p:txBody>
+      </p:sp>
+      <p:sp>
+        <p:nvSpPr>
+          <p:cNvPr id="21" name="TextBox 20"/>
+          <p:cNvSpPr txBox="1"/>
+          <p:nvPr/>
+        </p:nvSpPr>
+        <p:spPr>
+          <a:xfrm>
+            <a:off x="6492240" y="3986783"/>
+            <a:ext cx="4937760" cy="310896"/>
+          </a:xfrm>
+          <a:prstGeom prst="rect">
+            <a:avLst/>
+          </a:prstGeom>
+          <a:noFill/>
+        </p:spPr>
+        <p:txBody>
+          <a:bodyPr wrap="square" anchor="t" lIns="0" rIns="0" tIns="0" bIns="0">
+            <a:spAutoFit/>
+          </a:bodyPr>
+          <a:lstStyle/>
+          <a:p>
+            <a:pPr algn="l">
+              <a:lnSpc>
+                <a:spcPct val="125000"/>
+              </a:lnSpc>
+              <a:spcAft>
+                <a:spcPts val="800"/>
+              </a:spcAft>
+            </a:pPr>
+            <a:r>
+              <a:rPr sz="1500" b="1">
+                <a:solidFill>
+                  <a:srgbClr val="1F2937"/>
+                </a:solidFill>
+                <a:latin typeface="微软雅黑"/>
+                <a:ea typeface="微软雅黑"/>
+              </a:rPr>
+              <a:t>下一步</a:t>
+            </a:r>
+          </a:p>
+        </p:txBody>
+      </p:sp>
+      <p:sp>
+        <p:nvSpPr>
+          <p:cNvPr id="22" name="TextBox 21"/>
+          <p:cNvSpPr txBox="1"/>
+          <p:nvPr/>
+        </p:nvSpPr>
+        <p:spPr>
+          <a:xfrm>
+            <a:off x="6492240" y="4315968"/>
+            <a:ext cx="4937760" cy="988060"/>
+          </a:xfrm>
+          <a:prstGeom prst="rect">
+            <a:avLst/>
+          </a:prstGeom>
+          <a:noFill/>
+        </p:spPr>
+        <p:txBody>
+          <a:bodyPr wrap="square" anchor="t" lIns="0" rIns="0" tIns="0" bIns="0">
+            <a:spAutoFit/>
+          </a:bodyPr>
+          <a:lstStyle/>
+          <a:p>
+            <a:pPr algn="l">
+              <a:lnSpc>
+                <a:spcPct val="125000"/>
+              </a:lnSpc>
+              <a:spcAft>
+                <a:spcPts val="600"/>
+              </a:spcAft>
+            </a:pPr>
+            <a:r>
+              <a:rPr sz="1150" b="0">
+                <a:solidFill>
+                  <a:srgbClr val="1F2937"/>
+                </a:solidFill>
+                <a:latin typeface="微软雅黑"/>
+                <a:ea typeface="微软雅黑"/>
+              </a:rPr>
+              <a:t>把评分模板扩到更多课程与学科</a:t>
+            </a:r>
+          </a:p>
+          <a:p>
+            <a:pPr algn="l">
+              <a:lnSpc>
+                <a:spcPct val="125000"/>
+              </a:lnSpc>
+              <a:spcAft>
+                <a:spcPts val="600"/>
+              </a:spcAft>
+            </a:pPr>
+            <a:r>
+              <a:rPr sz="1150" b="0">
+                <a:solidFill>
+                  <a:srgbClr val="1F2937"/>
+                </a:solidFill>
+                <a:latin typeface="微软雅黑"/>
+                <a:ea typeface="微软雅黑"/>
+              </a:rPr>
+              <a:t>增加班级维度的批量视图与学情统计</a:t>
+            </a:r>
+          </a:p>
+          <a:p>
+            <a:pPr algn="l">
+              <a:lnSpc>
+                <a:spcPct val="125000"/>
+              </a:lnSpc>
+              <a:spcAft>
+                <a:spcPts val="600"/>
+              </a:spcAft>
+            </a:pPr>
+            <a:r>
+              <a:rPr sz="1150" b="0">
+                <a:solidFill>
+                  <a:srgbClr val="1F2937"/>
+                </a:solidFill>
+                <a:latin typeface="微软雅黑"/>
+                <a:ea typeface="微软雅黑"/>
+              </a:rPr>
+              <a:t>把多模态 OCR 扩到 DOCX 内嵌图片，并做一次读图准确率的人工抽样评测</a:t>
+            </a:r>
+          </a:p>
+        </p:txBody>
+      </p:sp>
+      <p:sp>
+        <p:nvSpPr>
+          <p:cNvPr id="23" name="TextBox 22"/>
+          <p:cNvSpPr txBox="1"/>
+          <p:nvPr/>
+        </p:nvSpPr>
+        <p:spPr>
+          <a:xfrm>
+            <a:off x="566928" y="5413248"/>
+            <a:ext cx="11064240" cy="822960"/>
+          </a:xfrm>
+          <a:prstGeom prst="rect">
+            <a:avLst/>
+          </a:prstGeom>
+          <a:noFill/>
+        </p:spPr>
+        <p:txBody>
+          <a:bodyPr wrap="square" anchor="t" lIns="0" rIns="0" tIns="0" bIns="0">
+            <a:spAutoFit/>
+          </a:bodyPr>
+          <a:lstStyle/>
+          <a:p>
+            <a:pPr algn="l">
+              <a:lnSpc>
+                <a:spcPct val="125000"/>
+              </a:lnSpc>
+              <a:spcAft>
+                <a:spcPts val="400"/>
+              </a:spcAft>
+            </a:pPr>
+            <a:r>
+              <a:rPr sz="1250" b="0">
+                <a:solidFill>
+                  <a:srgbClr val="6B7280"/>
+                </a:solidFill>
+                <a:latin typeface="微软雅黑"/>
+                <a:ea typeface="微软雅黑"/>
+              </a:rPr>
+              <a:t>本页每一句技术承诺，都能在仓库代码或在线演示中指认；指认不出的我们已经删掉了。所有数字均可由 tools/batch_run.py + tools/benchmark.py 复现。</a:t>
+            </a:r>
+          </a:p>
+          <a:p>
+            <a:pPr algn="l">
+              <a:lnSpc>
+                <a:spcPct val="125000"/>
+              </a:lnSpc>
+              <a:spcAft>
+                <a:spcPts val="800"/>
+              </a:spcAft>
+            </a:pPr>
+            <a:r>
+              <a:rPr sz="1250" b="1">
+                <a:solidFill>
+                  <a:srgbClr val="B45309"/>
+                </a:solidFill>
+                <a:latin typeface="微软雅黑"/>
+                <a:ea typeface="微软雅黑"/>
+              </a:rPr>
+              <a:t>提交前提示：MAE / 误差占比 / 可溯源率以最新一次 benchmark 为准，若与本次不一致请以新数字更新本页（本页与 README、作品主页读的是同一组值，三处必须一致 —— 评委交叉核对时对不上就是硬伤）。</a:t>
+            </a:r>
+          </a:p>
+        </p:txBody>
+      </p:sp>
+    </p:spTree>
+  </p:cSld>
+  <p:clrMapOvr>
+    <a:masterClrMapping/>
+  </p:clrMapOvr>
+</p:sld>
+</file>
+
 <file path=ppt/slides/slide2.xml><?xml version="1.0" encoding="utf-8"?>
 <p:sld xmlns:a="http://schemas.openxmlformats.org/drawingml/2006/main" xmlns:p="http://schemas.openxmlformats.org/presentationml/2006/main" xmlns:r="http://schemas.openxmlformats.org/officeDocument/2006/relationships">
   <p:cSld>
@@ -3964,7 +5136,7 @@
                 <a:latin typeface="微软雅黑"/>
                 <a:ea typeface="微软雅黑"/>
               </a:rPr>
-              <a:t>02 / 09</a:t>
+              <a:t>02 / 10</a:t>
             </a:r>
           </a:p>
         </p:txBody>
@@ -5081,7 +6253,7 @@
                 <a:latin typeface="微软雅黑"/>
                 <a:ea typeface="微软雅黑"/>
               </a:rPr>
-              <a:t>03 / 09</a:t>
+              <a:t>03 / 10</a:t>
             </a:r>
           </a:p>
         </p:txBody>
@@ -6553,7 +7725,7 @@
                 <a:latin typeface="微软雅黑"/>
                 <a:ea typeface="微软雅黑"/>
               </a:rPr>
-              <a:t>04 / 09</a:t>
+              <a:t>04 / 10</a:t>
             </a:r>
           </a:p>
         </p:txBody>
@@ -7420,7 +8592,7 @@
                 <a:latin typeface="微软雅黑"/>
                 <a:ea typeface="微软雅黑"/>
               </a:rPr>
-              <a:t>05 / 09</a:t>
+              <a:t>05 / 10</a:t>
             </a:r>
           </a:p>
         </p:txBody>
@@ -9082,7 +10254,7 @@
                 <a:latin typeface="微软雅黑"/>
                 <a:ea typeface="微软雅黑"/>
               </a:rPr>
-              <a:t>06 / 09</a:t>
+              <a:t>06 / 10</a:t>
             </a:r>
           </a:p>
         </p:txBody>
@@ -10239,7 +11411,7 @@
                 <a:latin typeface="微软雅黑"/>
                 <a:ea typeface="微软雅黑"/>
               </a:rPr>
-              <a:t>07 / 09</a:t>
+              <a:t>07 / 10</a:t>
             </a:r>
           </a:p>
         </p:txBody>
@@ -11152,7 +12324,7 @@
                 <a:latin typeface="微软雅黑"/>
                 <a:ea typeface="微软雅黑"/>
               </a:rPr>
-              <a:t>08 / 09</a:t>
+              <a:t>08 / 10</a:t>
             </a:r>
           </a:p>
         </p:txBody>
@@ -12395,7 +13567,7 @@
                 <a:latin typeface="微软雅黑"/>
                 <a:ea typeface="微软雅黑"/>
               </a:rPr>
-              <a:t>08 · AI 工具使用与下一步</a:t>
+              <a:t>08 · 用户验证与工具使用</a:t>
             </a:r>
           </a:p>
         </p:txBody>
@@ -12438,7 +13610,7 @@
                 <a:latin typeface="微软雅黑"/>
                 <a:ea typeface="微软雅黑"/>
               </a:rPr>
-              <a:t>AI 协作过程、团队与展望</a:t>
+              <a:t>真实反馈与 AI 协作过程</a:t>
             </a:r>
           </a:p>
         </p:txBody>
@@ -12570,7 +13742,7 @@
                 <a:latin typeface="微软雅黑"/>
                 <a:ea typeface="微软雅黑"/>
               </a:rPr>
-              <a:t>09 / 09</a:t>
+              <a:t>09 / 10</a:t>
             </a:r>
           </a:p>
         </p:txBody>
@@ -12584,7 +13756,7 @@
         <p:spPr>
           <a:xfrm>
             <a:off x="566928" y="1572768"/>
-            <a:ext cx="5486400" cy="2103120"/>
+            <a:ext cx="5486400" cy="2377440"/>
           </a:xfrm>
           <a:prstGeom prst="roundRect">
             <a:avLst>
@@ -12630,7 +13802,7 @@
         <p:spPr>
           <a:xfrm>
             <a:off x="566928" y="1572768"/>
-            <a:ext cx="50292" cy="2103120"/>
+            <a:ext cx="50292" cy="2377440"/>
           </a:xfrm>
           <a:prstGeom prst="roundRect">
             <a:avLst>
@@ -12705,7 +13877,7 @@
                 <a:latin typeface="微软雅黑"/>
                 <a:ea typeface="微软雅黑"/>
               </a:rPr>
-              <a:t>AI 帮我们抓到的两个真实缺陷</a:t>
+              <a:t>真实用户反馈（待补）</a:t>
             </a:r>
           </a:p>
         </p:txBody>
@@ -12719,7 +13891,7 @@
         <p:spPr>
           <a:xfrm>
             <a:off x="822960" y="2066543"/>
-            <a:ext cx="5029200" cy="1444751"/>
+            <a:ext cx="5029200" cy="1719072"/>
           </a:xfrm>
           <a:prstGeom prst="rect">
             <a:avLst/>
@@ -12741,14 +13913,14 @@
               </a:spcAft>
             </a:pPr>
             <a:r>
-              <a:rPr sz="1200" b="0">
+              <a:rPr sz="1100" b="0">
                 <a:solidFill>
                   <a:srgbClr val="1F2937"/>
                 </a:solidFill>
                 <a:latin typeface="微软雅黑"/>
                 <a:ea typeface="微软雅黑"/>
               </a:rPr>
-              <a:t>① 上下文丢失：模型只看到报告 7%~11% 内容（MAE 31.67 → 20.44）</a:t>
+              <a:t>**当前状态：尚无外部试用者的反馈记录，此页留空待补。**</a:t>
             </a:r>
           </a:p>
           <a:p>
@@ -12761,14 +13933,14 @@
               </a:spcAft>
             </a:pPr>
             <a:r>
-              <a:rPr sz="1200" b="0">
+              <a:rPr sz="1100" b="0">
                 <a:solidFill>
                   <a:srgbClr val="1F2937"/>
                 </a:solidFill>
                 <a:latin typeface="微软雅黑"/>
                 <a:ea typeface="微软雅黑"/>
               </a:rPr>
-              <a:t>② 反馈生成失败：异常被 except 吞掉，查不到原因；最后靠另一项功能测试才炸出真凶——输出的 JSON 含未转义引号</a:t>
+              <a:t>为什么不写好话：反馈页的价值在于它来自**不参与开发的人**。自己写的评价没有验证意义，写上去反而会让整份材料的可信度被怀疑。</a:t>
             </a:r>
           </a:p>
           <a:p>
@@ -12781,14 +13953,14 @@
               </a:spcAft>
             </a:pPr>
             <a:r>
-              <a:rPr sz="1200" b="0">
+              <a:rPr sz="1100" b="0">
                 <a:solidFill>
                   <a:srgbClr val="1F2937"/>
                 </a:solidFill>
                 <a:latin typeface="微软雅黑"/>
                 <a:ea typeface="微软雅黑"/>
               </a:rPr>
-              <a:t>两篇排查记录都在仓库 docs/ 下，是当时写下的，不是事后美化</a:t>
+              <a:t>补齐方式：找一位助教或同学独立试用一次（不提示、不引导），记录原话与遇到的问题，连截图一起放进来；反面意见同样要放 —— 「哪里不好用」比「哪里好用」更能证明真的被用过。</a:t>
             </a:r>
           </a:p>
         </p:txBody>
@@ -12802,7 +13974,7 @@
         <p:spPr>
           <a:xfrm>
             <a:off x="6236208" y="1572768"/>
-            <a:ext cx="5394960" cy="2103120"/>
+            <a:ext cx="5394960" cy="2673858"/>
           </a:xfrm>
           <a:prstGeom prst="roundRect">
             <a:avLst>
@@ -12848,7 +14020,7 @@
         <p:spPr>
           <a:xfrm>
             <a:off x="6236208" y="1572768"/>
-            <a:ext cx="50292" cy="2103120"/>
+            <a:ext cx="50292" cy="2673858"/>
           </a:xfrm>
           <a:prstGeom prst="roundRect">
             <a:avLst>
@@ -12856,7 +14028,7 @@
             </a:avLst>
           </a:prstGeom>
           <a:solidFill>
-            <a:srgbClr val="0F766E"/>
+            <a:srgbClr val="B45309"/>
           </a:solidFill>
           <a:ln>
             <a:noFill/>
@@ -12918,37 +14090,57 @@
             <a:r>
               <a:rPr sz="1500" b="1">
                 <a:solidFill>
+                  <a:srgbClr val="B45309"/>
+                </a:solidFill>
+                <a:latin typeface="微软雅黑"/>
+                <a:ea typeface="微软雅黑"/>
+              </a:rPr>
+              <a:t>AI 协作过程（可核对）</a:t>
+            </a:r>
+          </a:p>
+        </p:txBody>
+      </p:sp>
+      <p:sp>
+        <p:nvSpPr>
+          <p:cNvPr id="14" name="TextBox 13"/>
+          <p:cNvSpPr txBox="1"/>
+          <p:nvPr/>
+        </p:nvSpPr>
+        <p:spPr>
+          <a:xfrm>
+            <a:off x="6492240" y="2066543"/>
+            <a:ext cx="4937760" cy="2015490"/>
+          </a:xfrm>
+          <a:prstGeom prst="rect">
+            <a:avLst/>
+          </a:prstGeom>
+          <a:noFill/>
+        </p:spPr>
+        <p:txBody>
+          <a:bodyPr wrap="square" anchor="t" lIns="0" rIns="0" tIns="0" bIns="0">
+            <a:spAutoFit/>
+          </a:bodyPr>
+          <a:lstStyle/>
+          <a:p>
+            <a:pPr algn="l">
+              <a:lnSpc>
+                <a:spcPct val="125000"/>
+              </a:lnSpc>
+              <a:spcAft>
+                <a:spcPts val="600"/>
+              </a:spcAft>
+            </a:pPr>
+            <a:r>
+              <a:rPr sz="1100" b="0">
+                <a:solidFill>
                   <a:srgbClr val="1F2937"/>
                 </a:solidFill>
                 <a:latin typeface="微软雅黑"/>
                 <a:ea typeface="微软雅黑"/>
               </a:rPr>
-              <a:t>AI 在工程里的位置</a:t>
-            </a:r>
-          </a:p>
-        </p:txBody>
-      </p:sp>
-      <p:sp>
-        <p:nvSpPr>
-          <p:cNvPr id="14" name="TextBox 13"/>
-          <p:cNvSpPr txBox="1"/>
-          <p:nvPr/>
-        </p:nvSpPr>
-        <p:spPr>
-          <a:xfrm>
-            <a:off x="6492240" y="2066543"/>
-            <a:ext cx="4937760" cy="1444751"/>
-          </a:xfrm>
-          <a:prstGeom prst="rect">
-            <a:avLst/>
-          </a:prstGeom>
-          <a:noFill/>
-        </p:spPr>
-        <p:txBody>
-          <a:bodyPr wrap="square" anchor="t" lIns="0" rIns="0" tIns="0" bIns="0">
-            <a:spAutoFit/>
-          </a:bodyPr>
-          <a:lstStyle/>
+              <a:t>**完整的 AI 对话记录已随提交专区单独提交**，此处只列可核对的节点：</a:t>
+            </a:r>
+          </a:p>
           <a:p>
             <a:pPr algn="l">
               <a:lnSpc>
@@ -12959,14 +14151,14 @@
               </a:spcAft>
             </a:pPr>
             <a:r>
-              <a:rPr sz="1200" b="0">
+              <a:rPr sz="1100" b="0">
                 <a:solidFill>
                   <a:srgbClr val="1F2937"/>
                 </a:solidFill>
                 <a:latin typeface="微软雅黑"/>
                 <a:ea typeface="微软雅黑"/>
               </a:rPr>
-              <a:t>代码骨架、prompt 初稿、界面实现由 AI 协作产出</a:t>
+              <a:t>① AI 参与：代码骨架、prompt 初稿、界面实现、测试用例</a:t>
             </a:r>
           </a:p>
           <a:p>
@@ -12979,14 +14171,14 @@
               </a:spcAft>
             </a:pPr>
             <a:r>
-              <a:rPr sz="1200" b="0">
+              <a:rPr sz="1100" b="0">
                 <a:solidFill>
                   <a:srgbClr val="1F2937"/>
                 </a:solidFill>
                 <a:latin typeface="微软雅黑"/>
                 <a:ea typeface="微软雅黑"/>
               </a:rPr>
-              <a:t>判定规则、评分点定义、gold set 打分由人完成</a:t>
+              <a:t>② 人做判定：评分点定义、判定规则、gold set 独立打分、「不许吞异常」「不许放宽匹配规则」这两条纪律</a:t>
             </a:r>
           </a:p>
           <a:p>
@@ -12999,14 +14191,34 @@
               </a:spcAft>
             </a:pPr>
             <a:r>
-              <a:rPr sz="1200" b="0">
+              <a:rPr sz="1100" b="0">
                 <a:solidFill>
                   <a:srgbClr val="1F2937"/>
                 </a:solidFill>
                 <a:latin typeface="微软雅黑"/>
                 <a:ea typeface="微软雅黑"/>
               </a:rPr>
-              <a:t>「不许吞异常」「不许放宽匹配规则」是我们给自己立的规矩</a:t>
+              <a:t>③ AI 帮我们定位的真实缺陷：上下文丢失（只看到报告 7%~11%）、反馈生成失败（异常被 except 吞掉）</a:t>
+            </a:r>
+          </a:p>
+          <a:p>
+            <a:pPr algn="l">
+              <a:lnSpc>
+                <a:spcPct val="125000"/>
+              </a:lnSpc>
+              <a:spcAft>
+                <a:spcPts val="600"/>
+              </a:spcAft>
+            </a:pPr>
+            <a:r>
+              <a:rPr sz="1100" b="0">
+                <a:solidFill>
+                  <a:srgbClr val="1F2937"/>
+                </a:solidFill>
+                <a:latin typeface="微软雅黑"/>
+                <a:ea typeface="微软雅黑"/>
+              </a:rPr>
+              <a:t>④ 本轮新增：字距 artifact 导致引用校验失败 —— 由真机读图时发现</a:t>
             </a:r>
           </a:p>
         </p:txBody>
@@ -13019,8 +14231,8 @@
         </p:nvSpPr>
         <p:spPr>
           <a:xfrm>
-            <a:off x="566928" y="3822191"/>
-            <a:ext cx="5486400" cy="1795018"/>
+            <a:off x="566928" y="4069080"/>
+            <a:ext cx="11064240" cy="1600200"/>
           </a:xfrm>
           <a:prstGeom prst="roundRect">
             <a:avLst>
@@ -13065,8 +14277,8 @@
         </p:nvSpPr>
         <p:spPr>
           <a:xfrm>
-            <a:off x="566928" y="3822191"/>
-            <a:ext cx="50292" cy="1795018"/>
+            <a:off x="566928" y="4069080"/>
+            <a:ext cx="50292" cy="1600200"/>
           </a:xfrm>
           <a:prstGeom prst="roundRect">
             <a:avLst>
@@ -13074,7 +14286,7 @@
             </a:avLst>
           </a:prstGeom>
           <a:solidFill>
-            <a:srgbClr val="0F766E"/>
+            <a:srgbClr val="B45309"/>
           </a:solidFill>
           <a:ln>
             <a:noFill/>
@@ -13111,8 +14323,8 @@
         </p:nvSpPr>
         <p:spPr>
           <a:xfrm>
-            <a:off x="822960" y="3986783"/>
-            <a:ext cx="5029200" cy="310896"/>
+            <a:off x="822960" y="4233672"/>
+            <a:ext cx="10607040" cy="310896"/>
           </a:xfrm>
           <a:prstGeom prst="rect">
             <a:avLst/>
@@ -13136,26 +14348,89 @@
             <a:r>
               <a:rPr sz="1500" b="1">
                 <a:solidFill>
+                  <a:srgbClr val="B45309"/>
+                </a:solidFill>
+                <a:latin typeface="微软雅黑"/>
+                <a:ea typeface="微软雅黑"/>
+              </a:rPr>
+              <a:t>提交前必须回头确认这件事</a:t>
+            </a:r>
+          </a:p>
+        </p:txBody>
+      </p:sp>
+      <p:sp>
+        <p:nvSpPr>
+          <p:cNvPr id="18" name="TextBox 17"/>
+          <p:cNvSpPr txBox="1"/>
+          <p:nvPr/>
+        </p:nvSpPr>
+        <p:spPr>
+          <a:xfrm>
+            <a:off x="822960" y="4562856"/>
+            <a:ext cx="10607040" cy="941832"/>
+          </a:xfrm>
+          <a:prstGeom prst="rect">
+            <a:avLst/>
+          </a:prstGeom>
+          <a:noFill/>
+        </p:spPr>
+        <p:txBody>
+          <a:bodyPr wrap="square" anchor="t" lIns="0" rIns="0" tIns="0" bIns="0">
+            <a:spAutoFit/>
+          </a:bodyPr>
+          <a:lstStyle/>
+          <a:p>
+            <a:pPr algn="l">
+              <a:lnSpc>
+                <a:spcPct val="125000"/>
+              </a:lnSpc>
+              <a:spcAft>
+                <a:spcPts val="600"/>
+              </a:spcAft>
+            </a:pPr>
+            <a:r>
+              <a:rPr sz="1150" b="0">
+                <a:solidFill>
                   <a:srgbClr val="1F2937"/>
                 </a:solidFill>
                 <a:latin typeface="微软雅黑"/>
                 <a:ea typeface="微软雅黑"/>
               </a:rPr>
-              <a:t>团队与分工（2 人，均为计算机科学与技术专业）</a:t>
-            </a:r>
-          </a:p>
-        </p:txBody>
-      </p:sp>
-      <p:sp>
-        <p:nvSpPr>
-          <p:cNvPr id="18" name="TextBox 17"/>
-          <p:cNvSpPr txBox="1"/>
-          <p:nvPr/>
-        </p:nvSpPr>
-        <p:spPr>
-          <a:xfrm>
-            <a:off x="822960" y="4315968"/>
-            <a:ext cx="5029200" cy="1136650"/>
+              <a:t>自查清单里凡是打了勾的项，都要能在材料或演示中**指认**出来。本项目吃过一次亏：上一版清单把「PPT 含真实用户反馈页」和「含 AI 协作过程页」都打了勾，而 PPT 里两样都没有 —— 评委只要翻一遍就会发现，而这会连累所有其它数字的可信度。</a:t>
+            </a:r>
+          </a:p>
+          <a:p>
+            <a:pPr algn="l">
+              <a:lnSpc>
+                <a:spcPct val="125000"/>
+              </a:lnSpc>
+              <a:spcAft>
+                <a:spcPts val="600"/>
+              </a:spcAft>
+            </a:pPr>
+            <a:r>
+              <a:rPr sz="1150" b="0">
+                <a:solidFill>
+                  <a:srgbClr val="1F2937"/>
+                </a:solidFill>
+                <a:latin typeface="微软雅黑"/>
+                <a:ea typeface="微软雅黑"/>
+              </a:rPr>
+              <a:t>现在的做法：清单里没做到的一律留空并写明原因，不做任何预勾选。</a:t>
+            </a:r>
+          </a:p>
+        </p:txBody>
+      </p:sp>
+      <p:sp>
+        <p:nvSpPr>
+          <p:cNvPr id="19" name="TextBox 18"/>
+          <p:cNvSpPr txBox="1"/>
+          <p:nvPr/>
+        </p:nvSpPr>
+        <p:spPr>
+          <a:xfrm>
+            <a:off x="566928" y="5806440"/>
+            <a:ext cx="11064240" cy="457200"/>
           </a:xfrm>
           <a:prstGeom prst="rect">
             <a:avLst/>
@@ -13173,339 +14448,18 @@
                 <a:spcPct val="125000"/>
               </a:lnSpc>
               <a:spcAft>
-                <a:spcPts val="600"/>
-              </a:spcAft>
-            </a:pPr>
-            <a:r>
-              <a:rPr sz="1100" b="0">
-                <a:solidFill>
-                  <a:srgbClr val="1F2937"/>
-                </a:solidFill>
-                <a:latin typeface="微软雅黑"/>
-                <a:ea typeface="微软雅黑"/>
-              </a:rPr>
-              <a:t>黄宇科（主程）：代码 / 部署 / 版本管理 / 自评测工具</a:t>
-            </a:r>
-          </a:p>
-          <a:p>
-            <a:pPr algn="l">
-              <a:lnSpc>
-                <a:spcPct val="125000"/>
-              </a:lnSpc>
-              <a:spcAft>
-                <a:spcPts val="600"/>
-              </a:spcAft>
-            </a:pPr>
-            <a:r>
-              <a:rPr sz="1100" b="0">
-                <a:solidFill>
-                  <a:srgbClr val="1F2937"/>
-                </a:solidFill>
-                <a:latin typeface="微软雅黑"/>
-                <a:ea typeface="微软雅黑"/>
-              </a:rPr>
-              <a:t>张镒川（产品与材料）：报告脱敏 / 评分点整理 / 独立人工打分 / 试用 / PPT / 视频</a:t>
-            </a:r>
-          </a:p>
-          <a:p>
-            <a:pPr algn="l">
-              <a:lnSpc>
-                <a:spcPct val="125000"/>
-              </a:lnSpc>
-              <a:spcAft>
-                <a:spcPts val="600"/>
-              </a:spcAft>
-            </a:pPr>
-            <a:r>
-              <a:rPr sz="1100" b="0">
-                <a:solidFill>
-                  <a:srgbClr val="1F2937"/>
-                </a:solidFill>
-                <a:latin typeface="微软雅黑"/>
-                <a:ea typeface="微软雅黑"/>
-              </a:rPr>
-              <a:t>深圳大学计算机与软件学院 · 计算机科学与技术 · 2025 级 05 班</a:t>
-            </a:r>
-          </a:p>
-        </p:txBody>
-      </p:sp>
-      <p:sp>
-        <p:nvSpPr>
-          <p:cNvPr id="19" name="Rounded Rectangle 18"/>
-          <p:cNvSpPr/>
-          <p:nvPr/>
-        </p:nvSpPr>
-        <p:spPr>
-          <a:xfrm>
-            <a:off x="6236208" y="3822191"/>
-            <a:ext cx="5394960" cy="1646428"/>
-          </a:xfrm>
-          <a:prstGeom prst="roundRect">
-            <a:avLst>
-              <a:gd name="adj" fmla="val 8000"/>
-            </a:avLst>
-          </a:prstGeom>
-          <a:solidFill>
-            <a:srgbClr val="F3F4F6"/>
-          </a:solidFill>
-          <a:ln>
-            <a:noFill/>
-          </a:ln>
-          <a:effectLst/>
-        </p:spPr>
-        <p:style>
-          <a:lnRef idx="1">
-            <a:schemeClr val="accent1"/>
-          </a:lnRef>
-          <a:fillRef idx="3">
-            <a:schemeClr val="accent1"/>
-          </a:fillRef>
-          <a:effectRef idx="2">
-            <a:schemeClr val="accent1"/>
-          </a:effectRef>
-          <a:fontRef idx="minor">
-            <a:schemeClr val="lt1"/>
-          </a:fontRef>
-        </p:style>
-        <p:txBody>
-          <a:bodyPr rtlCol="0" anchor="ctr" wrap="square"/>
-          <a:lstStyle/>
-          <a:p>
-            <a:pPr algn="ctr"/>
-          </a:p>
-        </p:txBody>
-      </p:sp>
-      <p:sp>
-        <p:nvSpPr>
-          <p:cNvPr id="20" name="Rounded Rectangle 19"/>
-          <p:cNvSpPr/>
-          <p:nvPr/>
-        </p:nvSpPr>
-        <p:spPr>
-          <a:xfrm>
-            <a:off x="6236208" y="3822191"/>
-            <a:ext cx="50292" cy="1646428"/>
-          </a:xfrm>
-          <a:prstGeom prst="roundRect">
-            <a:avLst>
-              <a:gd name="adj" fmla="val 50000"/>
-            </a:avLst>
-          </a:prstGeom>
-          <a:solidFill>
-            <a:srgbClr val="0F766E"/>
-          </a:solidFill>
-          <a:ln>
-            <a:noFill/>
-          </a:ln>
-          <a:effectLst/>
-        </p:spPr>
-        <p:style>
-          <a:lnRef idx="1">
-            <a:schemeClr val="accent1"/>
-          </a:lnRef>
-          <a:fillRef idx="3">
-            <a:schemeClr val="accent1"/>
-          </a:fillRef>
-          <a:effectRef idx="2">
-            <a:schemeClr val="accent1"/>
-          </a:effectRef>
-          <a:fontRef idx="minor">
-            <a:schemeClr val="lt1"/>
-          </a:fontRef>
-        </p:style>
-        <p:txBody>
-          <a:bodyPr rtlCol="0" anchor="ctr" wrap="square"/>
-          <a:lstStyle/>
-          <a:p>
-            <a:pPr algn="ctr"/>
-          </a:p>
-        </p:txBody>
-      </p:sp>
-      <p:sp>
-        <p:nvSpPr>
-          <p:cNvPr id="21" name="TextBox 20"/>
-          <p:cNvSpPr txBox="1"/>
-          <p:nvPr/>
-        </p:nvSpPr>
-        <p:spPr>
-          <a:xfrm>
-            <a:off x="6492240" y="3986783"/>
-            <a:ext cx="4937760" cy="310896"/>
-          </a:xfrm>
-          <a:prstGeom prst="rect">
-            <a:avLst/>
-          </a:prstGeom>
-          <a:noFill/>
-        </p:spPr>
-        <p:txBody>
-          <a:bodyPr wrap="square" anchor="t" lIns="0" rIns="0" tIns="0" bIns="0">
-            <a:spAutoFit/>
-          </a:bodyPr>
-          <a:lstStyle/>
-          <a:p>
-            <a:pPr algn="l">
-              <a:lnSpc>
-                <a:spcPct val="125000"/>
-              </a:lnSpc>
-              <a:spcAft>
                 <a:spcPts val="800"/>
               </a:spcAft>
             </a:pPr>
             <a:r>
-              <a:rPr sz="1500" b="1">
-                <a:solidFill>
-                  <a:srgbClr val="1F2937"/>
-                </a:solidFill>
-                <a:latin typeface="微软雅黑"/>
-                <a:ea typeface="微软雅黑"/>
-              </a:rPr>
-              <a:t>下一步</a:t>
-            </a:r>
-          </a:p>
-        </p:txBody>
-      </p:sp>
-      <p:sp>
-        <p:nvSpPr>
-          <p:cNvPr id="22" name="TextBox 21"/>
-          <p:cNvSpPr txBox="1"/>
-          <p:nvPr/>
-        </p:nvSpPr>
-        <p:spPr>
-          <a:xfrm>
-            <a:off x="6492240" y="4315968"/>
-            <a:ext cx="4937760" cy="988060"/>
-          </a:xfrm>
-          <a:prstGeom prst="rect">
-            <a:avLst/>
-          </a:prstGeom>
-          <a:noFill/>
-        </p:spPr>
-        <p:txBody>
-          <a:bodyPr wrap="square" anchor="t" lIns="0" rIns="0" tIns="0" bIns="0">
-            <a:spAutoFit/>
-          </a:bodyPr>
-          <a:lstStyle/>
-          <a:p>
-            <a:pPr algn="l">
-              <a:lnSpc>
-                <a:spcPct val="125000"/>
-              </a:lnSpc>
-              <a:spcAft>
-                <a:spcPts val="600"/>
-              </a:spcAft>
-            </a:pPr>
-            <a:r>
-              <a:rPr sz="1150" b="0">
-                <a:solidFill>
-                  <a:srgbClr val="1F2937"/>
-                </a:solidFill>
-                <a:latin typeface="微软雅黑"/>
-                <a:ea typeface="微软雅黑"/>
-              </a:rPr>
-              <a:t>把评分模板扩到更多课程与学科</a:t>
-            </a:r>
-          </a:p>
-          <a:p>
-            <a:pPr algn="l">
-              <a:lnSpc>
-                <a:spcPct val="125000"/>
-              </a:lnSpc>
-              <a:spcAft>
-                <a:spcPts val="600"/>
-              </a:spcAft>
-            </a:pPr>
-            <a:r>
-              <a:rPr sz="1150" b="0">
-                <a:solidFill>
-                  <a:srgbClr val="1F2937"/>
-                </a:solidFill>
-                <a:latin typeface="微软雅黑"/>
-                <a:ea typeface="微软雅黑"/>
-              </a:rPr>
-              <a:t>增加班级维度的批量视图与学情统计</a:t>
-            </a:r>
-          </a:p>
-          <a:p>
-            <a:pPr algn="l">
-              <a:lnSpc>
-                <a:spcPct val="125000"/>
-              </a:lnSpc>
-              <a:spcAft>
-                <a:spcPts val="600"/>
-              </a:spcAft>
-            </a:pPr>
-            <a:r>
-              <a:rPr sz="1150" b="0">
-                <a:solidFill>
-                  <a:srgbClr val="1F2937"/>
-                </a:solidFill>
-                <a:latin typeface="微软雅黑"/>
-                <a:ea typeface="微软雅黑"/>
-              </a:rPr>
-              <a:t>把多模态 OCR 扩到 DOCX 内嵌图片，并做一次读图准确率的人工抽样评测</a:t>
-            </a:r>
-          </a:p>
-        </p:txBody>
-      </p:sp>
-      <p:sp>
-        <p:nvSpPr>
-          <p:cNvPr id="23" name="TextBox 22"/>
-          <p:cNvSpPr txBox="1"/>
-          <p:nvPr/>
-        </p:nvSpPr>
-        <p:spPr>
-          <a:xfrm>
-            <a:off x="566928" y="5413248"/>
-            <a:ext cx="11064240" cy="822960"/>
-          </a:xfrm>
-          <a:prstGeom prst="rect">
-            <a:avLst/>
-          </a:prstGeom>
-          <a:noFill/>
-        </p:spPr>
-        <p:txBody>
-          <a:bodyPr wrap="square" anchor="t" lIns="0" rIns="0" tIns="0" bIns="0">
-            <a:spAutoFit/>
-          </a:bodyPr>
-          <a:lstStyle/>
-          <a:p>
-            <a:pPr algn="l">
-              <a:lnSpc>
-                <a:spcPct val="125000"/>
-              </a:lnSpc>
-              <a:spcAft>
-                <a:spcPts val="400"/>
-              </a:spcAft>
-            </a:pPr>
-            <a:r>
-              <a:rPr sz="1250" b="0">
+              <a:rPr sz="1200" b="0">
                 <a:solidFill>
                   <a:srgbClr val="6B7280"/>
                 </a:solidFill>
                 <a:latin typeface="微软雅黑"/>
                 <a:ea typeface="微软雅黑"/>
               </a:rPr>
-              <a:t>本页每一句技术承诺，都能在仓库代码或在线演示中指认；指认不出的我们已经删掉了。所有数字均可由 tools/batch_run.py + tools/benchmark.py 复现。</a:t>
-            </a:r>
-          </a:p>
-          <a:p>
-            <a:pPr algn="l">
-              <a:lnSpc>
-                <a:spcPct val="125000"/>
-              </a:lnSpc>
-              <a:spcAft>
-                <a:spcPts val="800"/>
-              </a:spcAft>
-            </a:pPr>
-            <a:r>
-              <a:rPr sz="1250" b="1">
-                <a:solidFill>
-                  <a:srgbClr val="B45309"/>
-                </a:solidFill>
-                <a:latin typeface="微软雅黑"/>
-                <a:ea typeface="微软雅黑"/>
-              </a:rPr>
-              <a:t>提交前提示：MAE / 误差占比 / 可溯源率以最新一次 benchmark 为准，若与本次不一致请以新数字更新本页（本页与 README、作品主页读的是同一组值，三处必须一致 —— 评委交叉核对时对不上就是硬伤）。</a:t>
+              <a:t>这一页目前的定位是**如实交代未完成项**，而不是补一段好看的文案 —— 评审材料里最经不起检验的就是自己给自己写的用户评价。</a:t>
             </a:r>
           </a:p>
         </p:txBody>
